--- a/doc/20260227_Presentacion_AnexoB.pptx
+++ b/doc/20260227_Presentacion_AnexoB.pptx
@@ -125,7 +125,7 @@
 <file path=ppt/revisionInfo.xml><?xml version="1.0" encoding="utf-8"?>
 <p1510:revInfo xmlns:a="http://schemas.openxmlformats.org/drawingml/2006/main" xmlns:r="http://schemas.openxmlformats.org/officeDocument/2006/relationships" xmlns:p1510="http://schemas.microsoft.com/office/powerpoint/2015/10/main">
   <p1510:revLst>
-    <p1510:client id="{9D401D50-05F9-43B8-817C-3FD47A13B6D8}" v="255" dt="2026-02-28T09:32:32.112"/>
+    <p1510:client id="{9D401D50-05F9-43B8-817C-3FD47A13B6D8}" v="259" dt="2026-03-02T18:44:25.596"/>
   </p1510:revLst>
 </p1510:revInfo>
 </file>
@@ -135,7 +135,7 @@
   <pc:docChgLst>
     <pc:chgData name="Sofia Negueruela Avellaneda" userId="1355ce59-2ee3-4584-b6f2-c7e4b99958aa" providerId="ADAL" clId="{75AA7C8B-0E1E-45F8-BB8D-1CDD06E81B9F}"/>
     <pc:docChg chg="undo redo custSel addSld delSld modSld">
-      <pc:chgData name="Sofia Negueruela Avellaneda" userId="1355ce59-2ee3-4584-b6f2-c7e4b99958aa" providerId="ADAL" clId="{75AA7C8B-0E1E-45F8-BB8D-1CDD06E81B9F}" dt="2026-02-28T09:32:32.112" v="1895"/>
+      <pc:chgData name="Sofia Negueruela Avellaneda" userId="1355ce59-2ee3-4584-b6f2-c7e4b99958aa" providerId="ADAL" clId="{75AA7C8B-0E1E-45F8-BB8D-1CDD06E81B9F}" dt="2026-03-02T18:48:30.823" v="2274" actId="20577"/>
       <pc:docMkLst>
         <pc:docMk/>
       </pc:docMkLst>
@@ -159,174 +159,6 @@
             <pc:docMk/>
             <pc:sldMk cId="292513249" sldId="256"/>
             <ac:spMk id="3" creationId="{AE57164F-BC27-5F0D-3C21-6DECCB699AA1}"/>
-          </ac:spMkLst>
-        </pc:spChg>
-        <pc:spChg chg="add del">
-          <ac:chgData name="Sofia Negueruela Avellaneda" userId="1355ce59-2ee3-4584-b6f2-c7e4b99958aa" providerId="ADAL" clId="{75AA7C8B-0E1E-45F8-BB8D-1CDD06E81B9F}" dt="2026-02-28T09:32:09.025" v="1887" actId="26606"/>
-          <ac:spMkLst>
-            <pc:docMk/>
-            <pc:sldMk cId="292513249" sldId="256"/>
-            <ac:spMk id="8" creationId="{8C790BE2-4E4F-4AAF-81A2-4A6F4885EBE6}"/>
-          </ac:spMkLst>
-        </pc:spChg>
-        <pc:spChg chg="add del">
-          <ac:chgData name="Sofia Negueruela Avellaneda" userId="1355ce59-2ee3-4584-b6f2-c7e4b99958aa" providerId="ADAL" clId="{75AA7C8B-0E1E-45F8-BB8D-1CDD06E81B9F}" dt="2026-02-28T09:32:09.025" v="1887" actId="26606"/>
-          <ac:spMkLst>
-            <pc:docMk/>
-            <pc:sldMk cId="292513249" sldId="256"/>
-            <ac:spMk id="10" creationId="{D28B54C3-B57B-472A-B96E-1FCB67093DC2}"/>
-          </ac:spMkLst>
-        </pc:spChg>
-        <pc:spChg chg="add del">
-          <ac:chgData name="Sofia Negueruela Avellaneda" userId="1355ce59-2ee3-4584-b6f2-c7e4b99958aa" providerId="ADAL" clId="{75AA7C8B-0E1E-45F8-BB8D-1CDD06E81B9F}" dt="2026-02-28T09:32:09.025" v="1887" actId="26606"/>
-          <ac:spMkLst>
-            <pc:docMk/>
-            <pc:sldMk cId="292513249" sldId="256"/>
-            <ac:spMk id="12" creationId="{7DB3C429-F8DA-49B9-AF84-21996FCF78B5}"/>
-          </ac:spMkLst>
-        </pc:spChg>
-        <pc:spChg chg="add del">
-          <ac:chgData name="Sofia Negueruela Avellaneda" userId="1355ce59-2ee3-4584-b6f2-c7e4b99958aa" providerId="ADAL" clId="{75AA7C8B-0E1E-45F8-BB8D-1CDD06E81B9F}" dt="2026-02-28T09:32:09.025" v="1887" actId="26606"/>
-          <ac:spMkLst>
-            <pc:docMk/>
-            <pc:sldMk cId="292513249" sldId="256"/>
-            <ac:spMk id="14" creationId="{E12088DD-B1AD-40E0-8B86-1D87A2CCD9BE}"/>
-          </ac:spMkLst>
-        </pc:spChg>
-        <pc:spChg chg="add del">
-          <ac:chgData name="Sofia Negueruela Avellaneda" userId="1355ce59-2ee3-4584-b6f2-c7e4b99958aa" providerId="ADAL" clId="{75AA7C8B-0E1E-45F8-BB8D-1CDD06E81B9F}" dt="2026-02-28T09:32:09.025" v="1887" actId="26606"/>
-          <ac:spMkLst>
-            <pc:docMk/>
-            <pc:sldMk cId="292513249" sldId="256"/>
-            <ac:spMk id="16" creationId="{C4C9F2B0-1044-46EB-8AEB-C3BFFDE6C2CC}"/>
-          </ac:spMkLst>
-        </pc:spChg>
-        <pc:spChg chg="add del">
-          <ac:chgData name="Sofia Negueruela Avellaneda" userId="1355ce59-2ee3-4584-b6f2-c7e4b99958aa" providerId="ADAL" clId="{75AA7C8B-0E1E-45F8-BB8D-1CDD06E81B9F}" dt="2026-02-28T09:32:09.025" v="1887" actId="26606"/>
-          <ac:spMkLst>
-            <pc:docMk/>
-            <pc:sldMk cId="292513249" sldId="256"/>
-            <ac:spMk id="18" creationId="{0C395952-4E26-45A2-8756-2ADFD6E53C6E}"/>
-          </ac:spMkLst>
-        </pc:spChg>
-        <pc:spChg chg="add del">
-          <ac:chgData name="Sofia Negueruela Avellaneda" userId="1355ce59-2ee3-4584-b6f2-c7e4b99958aa" providerId="ADAL" clId="{75AA7C8B-0E1E-45F8-BB8D-1CDD06E81B9F}" dt="2026-02-28T09:32:09.025" v="1887" actId="26606"/>
-          <ac:spMkLst>
-            <pc:docMk/>
-            <pc:sldMk cId="292513249" sldId="256"/>
-            <ac:spMk id="20" creationId="{4734BADF-9461-4621-B112-2D7BABEA7DD0}"/>
-          </ac:spMkLst>
-        </pc:spChg>
-        <pc:spChg chg="add del">
-          <ac:chgData name="Sofia Negueruela Avellaneda" userId="1355ce59-2ee3-4584-b6f2-c7e4b99958aa" providerId="ADAL" clId="{75AA7C8B-0E1E-45F8-BB8D-1CDD06E81B9F}" dt="2026-02-28T09:32:12.786" v="1889" actId="26606"/>
-          <ac:spMkLst>
-            <pc:docMk/>
-            <pc:sldMk cId="292513249" sldId="256"/>
-            <ac:spMk id="22" creationId="{0E30439A-8A5B-46EC-8283-9B6B031D40D0}"/>
-          </ac:spMkLst>
-        </pc:spChg>
-        <pc:spChg chg="add del">
-          <ac:chgData name="Sofia Negueruela Avellaneda" userId="1355ce59-2ee3-4584-b6f2-c7e4b99958aa" providerId="ADAL" clId="{75AA7C8B-0E1E-45F8-BB8D-1CDD06E81B9F}" dt="2026-02-28T09:32:12.786" v="1889" actId="26606"/>
-          <ac:spMkLst>
-            <pc:docMk/>
-            <pc:sldMk cId="292513249" sldId="256"/>
-            <ac:spMk id="23" creationId="{5CEAD642-85CF-4750-8432-7C80C901F001}"/>
-          </ac:spMkLst>
-        </pc:spChg>
-        <pc:spChg chg="add del">
-          <ac:chgData name="Sofia Negueruela Avellaneda" userId="1355ce59-2ee3-4584-b6f2-c7e4b99958aa" providerId="ADAL" clId="{75AA7C8B-0E1E-45F8-BB8D-1CDD06E81B9F}" dt="2026-02-28T09:32:12.786" v="1889" actId="26606"/>
-          <ac:spMkLst>
-            <pc:docMk/>
-            <pc:sldMk cId="292513249" sldId="256"/>
-            <ac:spMk id="24" creationId="{FA33EEAE-15D5-4119-8C1E-89D943F911EF}"/>
-          </ac:spMkLst>
-        </pc:spChg>
-        <pc:spChg chg="add del">
-          <ac:chgData name="Sofia Negueruela Avellaneda" userId="1355ce59-2ee3-4584-b6f2-c7e4b99958aa" providerId="ADAL" clId="{75AA7C8B-0E1E-45F8-BB8D-1CDD06E81B9F}" dt="2026-02-28T09:32:12.786" v="1889" actId="26606"/>
-          <ac:spMkLst>
-            <pc:docMk/>
-            <pc:sldMk cId="292513249" sldId="256"/>
-            <ac:spMk id="25" creationId="{730D8B3B-9B80-4025-B934-26DC7D7CD231}"/>
-          </ac:spMkLst>
-        </pc:spChg>
-        <pc:spChg chg="add del">
-          <ac:chgData name="Sofia Negueruela Avellaneda" userId="1355ce59-2ee3-4584-b6f2-c7e4b99958aa" providerId="ADAL" clId="{75AA7C8B-0E1E-45F8-BB8D-1CDD06E81B9F}" dt="2026-02-28T09:32:12.786" v="1889" actId="26606"/>
-          <ac:spMkLst>
-            <pc:docMk/>
-            <pc:sldMk cId="292513249" sldId="256"/>
-            <ac:spMk id="26" creationId="{B5A1B09C-1565-46F8-B70F-621C5EB48A09}"/>
-          </ac:spMkLst>
-        </pc:spChg>
-        <pc:spChg chg="add del">
-          <ac:chgData name="Sofia Negueruela Avellaneda" userId="1355ce59-2ee3-4584-b6f2-c7e4b99958aa" providerId="ADAL" clId="{75AA7C8B-0E1E-45F8-BB8D-1CDD06E81B9F}" dt="2026-02-28T09:32:12.786" v="1889" actId="26606"/>
-          <ac:spMkLst>
-            <pc:docMk/>
-            <pc:sldMk cId="292513249" sldId="256"/>
-            <ac:spMk id="27" creationId="{8C516CC8-80AC-446C-A56E-9F54B7210402}"/>
-          </ac:spMkLst>
-        </pc:spChg>
-        <pc:spChg chg="add del">
-          <ac:chgData name="Sofia Negueruela Avellaneda" userId="1355ce59-2ee3-4584-b6f2-c7e4b99958aa" providerId="ADAL" clId="{75AA7C8B-0E1E-45F8-BB8D-1CDD06E81B9F}" dt="2026-02-28T09:32:12.786" v="1889" actId="26606"/>
-          <ac:spMkLst>
-            <pc:docMk/>
-            <pc:sldMk cId="292513249" sldId="256"/>
-            <ac:spMk id="28" creationId="{53947E58-F088-49F1-A3D1-DEA690192E84}"/>
-          </ac:spMkLst>
-        </pc:spChg>
-        <pc:spChg chg="add del">
-          <ac:chgData name="Sofia Negueruela Avellaneda" userId="1355ce59-2ee3-4584-b6f2-c7e4b99958aa" providerId="ADAL" clId="{75AA7C8B-0E1E-45F8-BB8D-1CDD06E81B9F}" dt="2026-02-28T09:32:21.395" v="1891" actId="26606"/>
-          <ac:spMkLst>
-            <pc:docMk/>
-            <pc:sldMk cId="292513249" sldId="256"/>
-            <ac:spMk id="30" creationId="{8C790BE2-4E4F-4AAF-81A2-4A6F4885EBE6}"/>
-          </ac:spMkLst>
-        </pc:spChg>
-        <pc:spChg chg="add del">
-          <ac:chgData name="Sofia Negueruela Avellaneda" userId="1355ce59-2ee3-4584-b6f2-c7e4b99958aa" providerId="ADAL" clId="{75AA7C8B-0E1E-45F8-BB8D-1CDD06E81B9F}" dt="2026-02-28T09:32:21.395" v="1891" actId="26606"/>
-          <ac:spMkLst>
-            <pc:docMk/>
-            <pc:sldMk cId="292513249" sldId="256"/>
-            <ac:spMk id="31" creationId="{D28B54C3-B57B-472A-B96E-1FCB67093DC2}"/>
-          </ac:spMkLst>
-        </pc:spChg>
-        <pc:spChg chg="add del">
-          <ac:chgData name="Sofia Negueruela Avellaneda" userId="1355ce59-2ee3-4584-b6f2-c7e4b99958aa" providerId="ADAL" clId="{75AA7C8B-0E1E-45F8-BB8D-1CDD06E81B9F}" dt="2026-02-28T09:32:21.395" v="1891" actId="26606"/>
-          <ac:spMkLst>
-            <pc:docMk/>
-            <pc:sldMk cId="292513249" sldId="256"/>
-            <ac:spMk id="32" creationId="{7DB3C429-F8DA-49B9-AF84-21996FCF78B5}"/>
-          </ac:spMkLst>
-        </pc:spChg>
-        <pc:spChg chg="add del">
-          <ac:chgData name="Sofia Negueruela Avellaneda" userId="1355ce59-2ee3-4584-b6f2-c7e4b99958aa" providerId="ADAL" clId="{75AA7C8B-0E1E-45F8-BB8D-1CDD06E81B9F}" dt="2026-02-28T09:32:21.395" v="1891" actId="26606"/>
-          <ac:spMkLst>
-            <pc:docMk/>
-            <pc:sldMk cId="292513249" sldId="256"/>
-            <ac:spMk id="33" creationId="{E12088DD-B1AD-40E0-8B86-1D87A2CCD9BE}"/>
-          </ac:spMkLst>
-        </pc:spChg>
-        <pc:spChg chg="add del">
-          <ac:chgData name="Sofia Negueruela Avellaneda" userId="1355ce59-2ee3-4584-b6f2-c7e4b99958aa" providerId="ADAL" clId="{75AA7C8B-0E1E-45F8-BB8D-1CDD06E81B9F}" dt="2026-02-28T09:32:21.395" v="1891" actId="26606"/>
-          <ac:spMkLst>
-            <pc:docMk/>
-            <pc:sldMk cId="292513249" sldId="256"/>
-            <ac:spMk id="34" creationId="{C4C9F2B0-1044-46EB-8AEB-C3BFFDE6C2CC}"/>
-          </ac:spMkLst>
-        </pc:spChg>
-        <pc:spChg chg="add del">
-          <ac:chgData name="Sofia Negueruela Avellaneda" userId="1355ce59-2ee3-4584-b6f2-c7e4b99958aa" providerId="ADAL" clId="{75AA7C8B-0E1E-45F8-BB8D-1CDD06E81B9F}" dt="2026-02-28T09:32:21.395" v="1891" actId="26606"/>
-          <ac:spMkLst>
-            <pc:docMk/>
-            <pc:sldMk cId="292513249" sldId="256"/>
-            <ac:spMk id="35" creationId="{0C395952-4E26-45A2-8756-2ADFD6E53C6E}"/>
-          </ac:spMkLst>
-        </pc:spChg>
-        <pc:spChg chg="add del">
-          <ac:chgData name="Sofia Negueruela Avellaneda" userId="1355ce59-2ee3-4584-b6f2-c7e4b99958aa" providerId="ADAL" clId="{75AA7C8B-0E1E-45F8-BB8D-1CDD06E81B9F}" dt="2026-02-28T09:32:21.395" v="1891" actId="26606"/>
-          <ac:spMkLst>
-            <pc:docMk/>
-            <pc:sldMk cId="292513249" sldId="256"/>
-            <ac:spMk id="36" creationId="{4734BADF-9461-4621-B112-2D7BABEA7DD0}"/>
           </ac:spMkLst>
         </pc:spChg>
         <pc:spChg chg="add">
@@ -395,7 +227,7 @@
         </pc:spChg>
       </pc:sldChg>
       <pc:sldChg chg="addSp delSp modSp new mod setBg addAnim delAnim modAnim modNotesTx">
-        <pc:chgData name="Sofia Negueruela Avellaneda" userId="1355ce59-2ee3-4584-b6f2-c7e4b99958aa" providerId="ADAL" clId="{75AA7C8B-0E1E-45F8-BB8D-1CDD06E81B9F}" dt="2026-02-28T09:32:32.112" v="1895"/>
+        <pc:chgData name="Sofia Negueruela Avellaneda" userId="1355ce59-2ee3-4584-b6f2-c7e4b99958aa" providerId="ADAL" clId="{75AA7C8B-0E1E-45F8-BB8D-1CDD06E81B9F}" dt="2026-03-02T18:48:30.823" v="2274" actId="20577"/>
         <pc:sldMkLst>
           <pc:docMk/>
           <pc:sldMk cId="1987742604" sldId="257"/>
@@ -406,158 +238,6 @@
             <pc:docMk/>
             <pc:sldMk cId="1987742604" sldId="257"/>
             <ac:spMk id="2" creationId="{81716728-8814-D95A-CB01-2FB8A139D1D4}"/>
-          </ac:spMkLst>
-        </pc:spChg>
-        <pc:spChg chg="del mod">
-          <ac:chgData name="Sofia Negueruela Avellaneda" userId="1355ce59-2ee3-4584-b6f2-c7e4b99958aa" providerId="ADAL" clId="{75AA7C8B-0E1E-45F8-BB8D-1CDD06E81B9F}" dt="2026-02-28T08:08:53.030" v="498" actId="478"/>
-          <ac:spMkLst>
-            <pc:docMk/>
-            <pc:sldMk cId="1987742604" sldId="257"/>
-            <ac:spMk id="3" creationId="{9241F013-FA29-AC67-9FA9-78CBF88960EE}"/>
-          </ac:spMkLst>
-        </pc:spChg>
-        <pc:spChg chg="add del">
-          <ac:chgData name="Sofia Negueruela Avellaneda" userId="1355ce59-2ee3-4584-b6f2-c7e4b99958aa" providerId="ADAL" clId="{75AA7C8B-0E1E-45F8-BB8D-1CDD06E81B9F}" dt="2026-02-28T08:08:32.103" v="495" actId="478"/>
-          <ac:spMkLst>
-            <pc:docMk/>
-            <pc:sldMk cId="1987742604" sldId="257"/>
-            <ac:spMk id="4" creationId="{4D9D04E5-BD76-3278-8D5F-E7BB6A62B0E0}"/>
-          </ac:spMkLst>
-        </pc:spChg>
-        <pc:spChg chg="add del mod">
-          <ac:chgData name="Sofia Negueruela Avellaneda" userId="1355ce59-2ee3-4584-b6f2-c7e4b99958aa" providerId="ADAL" clId="{75AA7C8B-0E1E-45F8-BB8D-1CDD06E81B9F}" dt="2026-02-28T08:08:57.405" v="499" actId="478"/>
-          <ac:spMkLst>
-            <pc:docMk/>
-            <pc:sldMk cId="1987742604" sldId="257"/>
-            <ac:spMk id="6" creationId="{32F5CE91-0304-195B-8D96-97EDC06E825B}"/>
-          </ac:spMkLst>
-        </pc:spChg>
-        <pc:spChg chg="add del">
-          <ac:chgData name="Sofia Negueruela Avellaneda" userId="1355ce59-2ee3-4584-b6f2-c7e4b99958aa" providerId="ADAL" clId="{75AA7C8B-0E1E-45F8-BB8D-1CDD06E81B9F}" dt="2026-02-28T08:10:18.919" v="504" actId="478"/>
-          <ac:spMkLst>
-            <pc:docMk/>
-            <pc:sldMk cId="1987742604" sldId="257"/>
-            <ac:spMk id="7" creationId="{2A57F895-CFE1-49E9-1035-2D2C6D2735B3}"/>
-          </ac:spMkLst>
-        </pc:spChg>
-        <pc:spChg chg="add del">
-          <ac:chgData name="Sofia Negueruela Avellaneda" userId="1355ce59-2ee3-4584-b6f2-c7e4b99958aa" providerId="ADAL" clId="{75AA7C8B-0E1E-45F8-BB8D-1CDD06E81B9F}" dt="2026-02-28T08:11:18.099" v="507" actId="26606"/>
-          <ac:spMkLst>
-            <pc:docMk/>
-            <pc:sldMk cId="1987742604" sldId="257"/>
-            <ac:spMk id="1039" creationId="{932495F0-C5CB-4823-AE70-EED61EBAB1BD}"/>
-          </ac:spMkLst>
-        </pc:spChg>
-        <pc:spChg chg="add del">
-          <ac:chgData name="Sofia Negueruela Avellaneda" userId="1355ce59-2ee3-4584-b6f2-c7e4b99958aa" providerId="ADAL" clId="{75AA7C8B-0E1E-45F8-BB8D-1CDD06E81B9F}" dt="2026-02-28T08:11:18.099" v="507" actId="26606"/>
-          <ac:spMkLst>
-            <pc:docMk/>
-            <pc:sldMk cId="1987742604" sldId="257"/>
-            <ac:spMk id="1041" creationId="{CB8B9C25-D80D-48EC-B83A-231219A80C3F}"/>
-          </ac:spMkLst>
-        </pc:spChg>
-        <pc:spChg chg="add del">
-          <ac:chgData name="Sofia Negueruela Avellaneda" userId="1355ce59-2ee3-4584-b6f2-c7e4b99958aa" providerId="ADAL" clId="{75AA7C8B-0E1E-45F8-BB8D-1CDD06E81B9F}" dt="2026-02-28T08:11:18.099" v="507" actId="26606"/>
-          <ac:spMkLst>
-            <pc:docMk/>
-            <pc:sldMk cId="1987742604" sldId="257"/>
-            <ac:spMk id="1043" creationId="{601CC70B-8875-45A1-8AFD-7D546E3C0C16}"/>
-          </ac:spMkLst>
-        </pc:spChg>
-        <pc:spChg chg="add del">
-          <ac:chgData name="Sofia Negueruela Avellaneda" userId="1355ce59-2ee3-4584-b6f2-c7e4b99958aa" providerId="ADAL" clId="{75AA7C8B-0E1E-45F8-BB8D-1CDD06E81B9F}" dt="2026-02-28T08:11:22.566" v="510" actId="26606"/>
-          <ac:spMkLst>
-            <pc:docMk/>
-            <pc:sldMk cId="1987742604" sldId="257"/>
-            <ac:spMk id="1045" creationId="{C497725C-6431-496A-B11C-691354780DCD}"/>
-          </ac:spMkLst>
-        </pc:spChg>
-        <pc:spChg chg="add del">
-          <ac:chgData name="Sofia Negueruela Avellaneda" userId="1355ce59-2ee3-4584-b6f2-c7e4b99958aa" providerId="ADAL" clId="{75AA7C8B-0E1E-45F8-BB8D-1CDD06E81B9F}" dt="2026-02-28T08:11:22.566" v="510" actId="26606"/>
-          <ac:spMkLst>
-            <pc:docMk/>
-            <pc:sldMk cId="1987742604" sldId="257"/>
-            <ac:spMk id="1046" creationId="{B81933D1-5615-42C7-9C0B-4EB7105CCE2D}"/>
-          </ac:spMkLst>
-        </pc:spChg>
-        <pc:spChg chg="add del">
-          <ac:chgData name="Sofia Negueruela Avellaneda" userId="1355ce59-2ee3-4584-b6f2-c7e4b99958aa" providerId="ADAL" clId="{75AA7C8B-0E1E-45F8-BB8D-1CDD06E81B9F}" dt="2026-02-28T08:11:22.566" v="510" actId="26606"/>
-          <ac:spMkLst>
-            <pc:docMk/>
-            <pc:sldMk cId="1987742604" sldId="257"/>
-            <ac:spMk id="1048" creationId="{B089A89A-1E9C-4761-9DFF-53C275FBF870}"/>
-          </ac:spMkLst>
-        </pc:spChg>
-        <pc:spChg chg="add del">
-          <ac:chgData name="Sofia Negueruela Avellaneda" userId="1355ce59-2ee3-4584-b6f2-c7e4b99958aa" providerId="ADAL" clId="{75AA7C8B-0E1E-45F8-BB8D-1CDD06E81B9F}" dt="2026-02-28T08:11:22.566" v="510" actId="26606"/>
-          <ac:spMkLst>
-            <pc:docMk/>
-            <pc:sldMk cId="1987742604" sldId="257"/>
-            <ac:spMk id="1050" creationId="{19C9EAEA-39D0-4B0E-A0EB-51E7B26740B1}"/>
-          </ac:spMkLst>
-        </pc:spChg>
-        <pc:spChg chg="add del">
-          <ac:chgData name="Sofia Negueruela Avellaneda" userId="1355ce59-2ee3-4584-b6f2-c7e4b99958aa" providerId="ADAL" clId="{75AA7C8B-0E1E-45F8-BB8D-1CDD06E81B9F}" dt="2026-02-28T08:11:25.417" v="512" actId="26606"/>
-          <ac:spMkLst>
-            <pc:docMk/>
-            <pc:sldMk cId="1987742604" sldId="257"/>
-            <ac:spMk id="1052" creationId="{D55CA618-78A6-47F6-B865-E9315164FB49}"/>
-          </ac:spMkLst>
-        </pc:spChg>
-        <pc:spChg chg="add del">
-          <ac:chgData name="Sofia Negueruela Avellaneda" userId="1355ce59-2ee3-4584-b6f2-c7e4b99958aa" providerId="ADAL" clId="{75AA7C8B-0E1E-45F8-BB8D-1CDD06E81B9F}" dt="2026-02-28T08:11:25.417" v="512" actId="26606"/>
-          <ac:spMkLst>
-            <pc:docMk/>
-            <pc:sldMk cId="1987742604" sldId="257"/>
-            <ac:spMk id="1056" creationId="{8ED94938-268E-4C0A-A08A-B3980C78BAEB}"/>
-          </ac:spMkLst>
-        </pc:spChg>
-        <pc:spChg chg="add del">
-          <ac:chgData name="Sofia Negueruela Avellaneda" userId="1355ce59-2ee3-4584-b6f2-c7e4b99958aa" providerId="ADAL" clId="{75AA7C8B-0E1E-45F8-BB8D-1CDD06E81B9F}" dt="2026-02-28T08:11:31.817" v="514" actId="26606"/>
-          <ac:spMkLst>
-            <pc:docMk/>
-            <pc:sldMk cId="1987742604" sldId="257"/>
-            <ac:spMk id="1058" creationId="{78BA5F19-D5E1-4ECC-BEC2-DF7AEDFD7C50}"/>
-          </ac:spMkLst>
-        </pc:spChg>
-        <pc:spChg chg="add del">
-          <ac:chgData name="Sofia Negueruela Avellaneda" userId="1355ce59-2ee3-4584-b6f2-c7e4b99958aa" providerId="ADAL" clId="{75AA7C8B-0E1E-45F8-BB8D-1CDD06E81B9F}" dt="2026-02-28T08:11:31.817" v="514" actId="26606"/>
-          <ac:spMkLst>
-            <pc:docMk/>
-            <pc:sldMk cId="1987742604" sldId="257"/>
-            <ac:spMk id="1059" creationId="{BB4D578A-F2C4-4EA9-A811-B48E66D63696}"/>
-          </ac:spMkLst>
-        </pc:spChg>
-        <pc:spChg chg="add del">
-          <ac:chgData name="Sofia Negueruela Avellaneda" userId="1355ce59-2ee3-4584-b6f2-c7e4b99958aa" providerId="ADAL" clId="{75AA7C8B-0E1E-45F8-BB8D-1CDD06E81B9F}" dt="2026-02-28T08:12:19.150" v="522" actId="26606"/>
-          <ac:spMkLst>
-            <pc:docMk/>
-            <pc:sldMk cId="1987742604" sldId="257"/>
-            <ac:spMk id="1061" creationId="{D880886B-02ED-4317-9236-CB60C22CF7F3}"/>
-          </ac:spMkLst>
-        </pc:spChg>
-        <pc:spChg chg="add del">
-          <ac:chgData name="Sofia Negueruela Avellaneda" userId="1355ce59-2ee3-4584-b6f2-c7e4b99958aa" providerId="ADAL" clId="{75AA7C8B-0E1E-45F8-BB8D-1CDD06E81B9F}" dt="2026-02-28T08:12:19.150" v="522" actId="26606"/>
-          <ac:spMkLst>
-            <pc:docMk/>
-            <pc:sldMk cId="1987742604" sldId="257"/>
-            <ac:spMk id="1062" creationId="{28C31856-6ABF-41FD-B683-B06E5FFF926B}"/>
-          </ac:spMkLst>
-        </pc:spChg>
-        <pc:spChg chg="add del">
-          <ac:chgData name="Sofia Negueruela Avellaneda" userId="1355ce59-2ee3-4584-b6f2-c7e4b99958aa" providerId="ADAL" clId="{75AA7C8B-0E1E-45F8-BB8D-1CDD06E81B9F}" dt="2026-02-28T08:30:46.979" v="856" actId="26606"/>
-          <ac:spMkLst>
-            <pc:docMk/>
-            <pc:sldMk cId="1987742604" sldId="257"/>
-            <ac:spMk id="1067" creationId="{C4879EFC-8E62-4E00-973C-C45EE9EC676D}"/>
-          </ac:spMkLst>
-        </pc:spChg>
-        <pc:spChg chg="add del">
-          <ac:chgData name="Sofia Negueruela Avellaneda" userId="1355ce59-2ee3-4584-b6f2-c7e4b99958aa" providerId="ADAL" clId="{75AA7C8B-0E1E-45F8-BB8D-1CDD06E81B9F}" dt="2026-02-28T08:30:46.979" v="856" actId="26606"/>
-          <ac:spMkLst>
-            <pc:docMk/>
-            <pc:sldMk cId="1987742604" sldId="257"/>
-            <ac:spMk id="1069" creationId="{D6A9C53F-5F90-40A5-8C85-5412D39C8C68}"/>
           </ac:spMkLst>
         </pc:spChg>
         <pc:spChg chg="add">
@@ -600,36 +280,12 @@
             <ac:spMk id="1082" creationId="{DC701763-729E-462F-A5A8-E0DEFEB1E2E4}"/>
           </ac:spMkLst>
         </pc:spChg>
-        <pc:grpChg chg="add del">
-          <ac:chgData name="Sofia Negueruela Avellaneda" userId="1355ce59-2ee3-4584-b6f2-c7e4b99958aa" providerId="ADAL" clId="{75AA7C8B-0E1E-45F8-BB8D-1CDD06E81B9F}" dt="2026-02-28T08:11:22.566" v="510" actId="26606"/>
-          <ac:grpSpMkLst>
-            <pc:docMk/>
-            <pc:sldMk cId="1987742604" sldId="257"/>
-            <ac:grpSpMk id="1047" creationId="{032D8612-31EB-44CF-A1D0-14FD4C705424}"/>
-          </ac:grpSpMkLst>
-        </pc:grpChg>
-        <pc:grpChg chg="add del">
-          <ac:chgData name="Sofia Negueruela Avellaneda" userId="1355ce59-2ee3-4584-b6f2-c7e4b99958aa" providerId="ADAL" clId="{75AA7C8B-0E1E-45F8-BB8D-1CDD06E81B9F}" dt="2026-02-28T08:11:25.417" v="512" actId="26606"/>
-          <ac:grpSpMkLst>
-            <pc:docMk/>
-            <pc:sldMk cId="1987742604" sldId="257"/>
-            <ac:grpSpMk id="1053" creationId="{B83D307E-DF68-43F8-97CE-0AAE950A7129}"/>
-          </ac:grpSpMkLst>
-        </pc:grpChg>
         <pc:picChg chg="add mod ord">
           <ac:chgData name="Sofia Negueruela Avellaneda" userId="1355ce59-2ee3-4584-b6f2-c7e4b99958aa" providerId="ADAL" clId="{75AA7C8B-0E1E-45F8-BB8D-1CDD06E81B9F}" dt="2026-02-28T08:30:46.979" v="856" actId="26606"/>
           <ac:picMkLst>
             <pc:docMk/>
             <pc:sldMk cId="1987742604" sldId="257"/>
             <ac:picMk id="1028" creationId="{A8F3D146-3702-98A4-CD6D-C9EB21828969}"/>
-          </ac:picMkLst>
-        </pc:picChg>
-        <pc:picChg chg="add del">
-          <ac:chgData name="Sofia Negueruela Avellaneda" userId="1355ce59-2ee3-4584-b6f2-c7e4b99958aa" providerId="ADAL" clId="{75AA7C8B-0E1E-45F8-BB8D-1CDD06E81B9F}" dt="2026-02-28T08:09:51.949" v="502" actId="478"/>
-          <ac:picMkLst>
-            <pc:docMk/>
-            <pc:sldMk cId="1987742604" sldId="257"/>
-            <ac:picMk id="1030" creationId="{ADEC8355-414A-9A0B-43DB-D25A7F63A01D}"/>
           </ac:picMkLst>
         </pc:picChg>
         <pc:picChg chg="add mod">
@@ -642,7 +298,7 @@
         </pc:picChg>
       </pc:sldChg>
       <pc:sldChg chg="addSp delSp modSp new mod setBg modNotesTx">
-        <pc:chgData name="Sofia Negueruela Avellaneda" userId="1355ce59-2ee3-4584-b6f2-c7e4b99958aa" providerId="ADAL" clId="{75AA7C8B-0E1E-45F8-BB8D-1CDD06E81B9F}" dt="2026-02-28T08:36:16.703" v="954" actId="1076"/>
+        <pc:chgData name="Sofia Negueruela Avellaneda" userId="1355ce59-2ee3-4584-b6f2-c7e4b99958aa" providerId="ADAL" clId="{75AA7C8B-0E1E-45F8-BB8D-1CDD06E81B9F}" dt="2026-03-02T18:44:25.580" v="1971" actId="1076"/>
         <pc:sldMkLst>
           <pc:docMk/>
           <pc:sldMk cId="1030600834" sldId="258"/>
@@ -655,100 +311,12 @@
             <ac:spMk id="2" creationId="{4B14B4BB-8D41-B024-CD71-9A851A36C83B}"/>
           </ac:spMkLst>
         </pc:spChg>
-        <pc:spChg chg="add del mod">
-          <ac:chgData name="Sofia Negueruela Avellaneda" userId="1355ce59-2ee3-4584-b6f2-c7e4b99958aa" providerId="ADAL" clId="{75AA7C8B-0E1E-45F8-BB8D-1CDD06E81B9F}" dt="2026-02-28T08:29:04.373" v="768" actId="26606"/>
+        <pc:spChg chg="add mod">
+          <ac:chgData name="Sofia Negueruela Avellaneda" userId="1355ce59-2ee3-4584-b6f2-c7e4b99958aa" providerId="ADAL" clId="{75AA7C8B-0E1E-45F8-BB8D-1CDD06E81B9F}" dt="2026-03-02T18:44:25.580" v="1971" actId="1076"/>
           <ac:spMkLst>
             <pc:docMk/>
             <pc:sldMk cId="1030600834" sldId="258"/>
-            <ac:spMk id="3" creationId="{BCC659C1-0700-6F7F-051C-7825288F4E22}"/>
-          </ac:spMkLst>
-        </pc:spChg>
-        <pc:spChg chg="add del">
-          <ac:chgData name="Sofia Negueruela Avellaneda" userId="1355ce59-2ee3-4584-b6f2-c7e4b99958aa" providerId="ADAL" clId="{75AA7C8B-0E1E-45F8-BB8D-1CDD06E81B9F}" dt="2026-02-28T08:32:21.603" v="858" actId="26606"/>
-          <ac:spMkLst>
-            <pc:docMk/>
-            <pc:sldMk cId="1030600834" sldId="258"/>
-            <ac:spMk id="9" creationId="{BACC6370-2D7E-4714-9D71-7542949D7D5D}"/>
-          </ac:spMkLst>
-        </pc:spChg>
-        <pc:spChg chg="add del">
-          <ac:chgData name="Sofia Negueruela Avellaneda" userId="1355ce59-2ee3-4584-b6f2-c7e4b99958aa" providerId="ADAL" clId="{75AA7C8B-0E1E-45F8-BB8D-1CDD06E81B9F}" dt="2026-02-28T08:32:21.603" v="858" actId="26606"/>
-          <ac:spMkLst>
-            <pc:docMk/>
-            <pc:sldMk cId="1030600834" sldId="258"/>
-            <ac:spMk id="11" creationId="{F68B3F68-107C-434F-AA38-110D5EA91B85}"/>
-          </ac:spMkLst>
-        </pc:spChg>
-        <pc:spChg chg="add del">
-          <ac:chgData name="Sofia Negueruela Avellaneda" userId="1355ce59-2ee3-4584-b6f2-c7e4b99958aa" providerId="ADAL" clId="{75AA7C8B-0E1E-45F8-BB8D-1CDD06E81B9F}" dt="2026-02-28T08:32:21.603" v="858" actId="26606"/>
-          <ac:spMkLst>
-            <pc:docMk/>
-            <pc:sldMk cId="1030600834" sldId="258"/>
-            <ac:spMk id="13" creationId="{AAD0DBB9-1A4B-4391-81D4-CB19F9AB918A}"/>
-          </ac:spMkLst>
-        </pc:spChg>
-        <pc:spChg chg="add del">
-          <ac:chgData name="Sofia Negueruela Avellaneda" userId="1355ce59-2ee3-4584-b6f2-c7e4b99958aa" providerId="ADAL" clId="{75AA7C8B-0E1E-45F8-BB8D-1CDD06E81B9F}" dt="2026-02-28T08:32:21.603" v="858" actId="26606"/>
-          <ac:spMkLst>
-            <pc:docMk/>
-            <pc:sldMk cId="1030600834" sldId="258"/>
-            <ac:spMk id="15" creationId="{063BBA22-50EA-4C4D-BE05-F1CE4E63AA56}"/>
-          </ac:spMkLst>
-        </pc:spChg>
-        <pc:spChg chg="add del">
-          <ac:chgData name="Sofia Negueruela Avellaneda" userId="1355ce59-2ee3-4584-b6f2-c7e4b99958aa" providerId="ADAL" clId="{75AA7C8B-0E1E-45F8-BB8D-1CDD06E81B9F}" dt="2026-02-28T08:29:00.285" v="762" actId="26606"/>
-          <ac:spMkLst>
-            <pc:docMk/>
-            <pc:sldMk cId="1030600834" sldId="258"/>
-            <ac:spMk id="20" creationId="{BACC6370-2D7E-4714-9D71-7542949D7D5D}"/>
-          </ac:spMkLst>
-        </pc:spChg>
-        <pc:spChg chg="add del">
-          <ac:chgData name="Sofia Negueruela Avellaneda" userId="1355ce59-2ee3-4584-b6f2-c7e4b99958aa" providerId="ADAL" clId="{75AA7C8B-0E1E-45F8-BB8D-1CDD06E81B9F}" dt="2026-02-28T08:29:00.285" v="762" actId="26606"/>
-          <ac:spMkLst>
-            <pc:docMk/>
-            <pc:sldMk cId="1030600834" sldId="258"/>
-            <ac:spMk id="22" creationId="{F68B3F68-107C-434F-AA38-110D5EA91B85}"/>
-          </ac:spMkLst>
-        </pc:spChg>
-        <pc:spChg chg="add del">
-          <ac:chgData name="Sofia Negueruela Avellaneda" userId="1355ce59-2ee3-4584-b6f2-c7e4b99958aa" providerId="ADAL" clId="{75AA7C8B-0E1E-45F8-BB8D-1CDD06E81B9F}" dt="2026-02-28T08:29:00.285" v="762" actId="26606"/>
-          <ac:spMkLst>
-            <pc:docMk/>
-            <pc:sldMk cId="1030600834" sldId="258"/>
-            <ac:spMk id="24" creationId="{AAD0DBB9-1A4B-4391-81D4-CB19F9AB918A}"/>
-          </ac:spMkLst>
-        </pc:spChg>
-        <pc:spChg chg="add del">
-          <ac:chgData name="Sofia Negueruela Avellaneda" userId="1355ce59-2ee3-4584-b6f2-c7e4b99958aa" providerId="ADAL" clId="{75AA7C8B-0E1E-45F8-BB8D-1CDD06E81B9F}" dt="2026-02-28T08:29:00.285" v="762" actId="26606"/>
-          <ac:spMkLst>
-            <pc:docMk/>
-            <pc:sldMk cId="1030600834" sldId="258"/>
-            <ac:spMk id="26" creationId="{063BBA22-50EA-4C4D-BE05-F1CE4E63AA56}"/>
-          </ac:spMkLst>
-        </pc:spChg>
-        <pc:spChg chg="add del">
-          <ac:chgData name="Sofia Negueruela Avellaneda" userId="1355ce59-2ee3-4584-b6f2-c7e4b99958aa" providerId="ADAL" clId="{75AA7C8B-0E1E-45F8-BB8D-1CDD06E81B9F}" dt="2026-02-28T08:32:59.251" v="866" actId="26606"/>
-          <ac:spMkLst>
-            <pc:docMk/>
-            <pc:sldMk cId="1030600834" sldId="258"/>
-            <ac:spMk id="2055" creationId="{C681C32C-7AFC-4BB3-9088-65CBDFC5D1C2}"/>
-          </ac:spMkLst>
-        </pc:spChg>
-        <pc:spChg chg="add del">
-          <ac:chgData name="Sofia Negueruela Avellaneda" userId="1355ce59-2ee3-4584-b6f2-c7e4b99958aa" providerId="ADAL" clId="{75AA7C8B-0E1E-45F8-BB8D-1CDD06E81B9F}" dt="2026-02-28T08:32:59.251" v="866" actId="26606"/>
-          <ac:spMkLst>
-            <pc:docMk/>
-            <pc:sldMk cId="1030600834" sldId="258"/>
-            <ac:spMk id="2057" creationId="{199C0ED0-69DE-4C31-A5CF-E2A46FD30226}"/>
-          </ac:spMkLst>
-        </pc:spChg>
-        <pc:spChg chg="add del">
-          <ac:chgData name="Sofia Negueruela Avellaneda" userId="1355ce59-2ee3-4584-b6f2-c7e4b99958aa" providerId="ADAL" clId="{75AA7C8B-0E1E-45F8-BB8D-1CDD06E81B9F}" dt="2026-02-28T08:32:59.251" v="866" actId="26606"/>
-          <ac:spMkLst>
-            <pc:docMk/>
-            <pc:sldMk cId="1030600834" sldId="258"/>
-            <ac:spMk id="2059" creationId="{8D42B8BD-40AF-488E-8A79-D7256C917229}"/>
+            <ac:spMk id="3" creationId="{4F058122-0ED0-A06D-74CC-4FFD9AD1E58F}"/>
           </ac:spMkLst>
         </pc:spChg>
         <pc:spChg chg="add">
@@ -775,6 +343,14 @@
             <ac:spMk id="2068" creationId="{8D42B8BD-40AF-488E-8A79-D7256C917229}"/>
           </ac:spMkLst>
         </pc:spChg>
+        <pc:grpChg chg="add mod">
+          <ac:chgData name="Sofia Negueruela Avellaneda" userId="1355ce59-2ee3-4584-b6f2-c7e4b99958aa" providerId="ADAL" clId="{75AA7C8B-0E1E-45F8-BB8D-1CDD06E81B9F}" dt="2026-03-02T18:44:25.580" v="1971" actId="1076"/>
+          <ac:grpSpMkLst>
+            <pc:docMk/>
+            <pc:sldMk cId="1030600834" sldId="258"/>
+            <ac:grpSpMk id="4" creationId="{219076BD-3A9F-ED8E-0424-86E085840F64}"/>
+          </ac:grpSpMkLst>
+        </pc:grpChg>
         <pc:graphicFrameChg chg="add del mod ord modGraphic">
           <ac:chgData name="Sofia Negueruela Avellaneda" userId="1355ce59-2ee3-4584-b6f2-c7e4b99958aa" providerId="ADAL" clId="{75AA7C8B-0E1E-45F8-BB8D-1CDD06E81B9F}" dt="2026-02-28T08:36:03.873" v="951" actId="1076"/>
           <ac:graphicFrameMkLst>
@@ -784,7 +360,7 @@
           </ac:graphicFrameMkLst>
         </pc:graphicFrameChg>
         <pc:picChg chg="add mod">
-          <ac:chgData name="Sofia Negueruela Avellaneda" userId="1355ce59-2ee3-4584-b6f2-c7e4b99958aa" providerId="ADAL" clId="{75AA7C8B-0E1E-45F8-BB8D-1CDD06E81B9F}" dt="2026-02-28T08:36:06.619" v="952" actId="1076"/>
+          <ac:chgData name="Sofia Negueruela Avellaneda" userId="1355ce59-2ee3-4584-b6f2-c7e4b99958aa" providerId="ADAL" clId="{75AA7C8B-0E1E-45F8-BB8D-1CDD06E81B9F}" dt="2026-03-02T18:44:25.580" v="1971" actId="1076"/>
           <ac:picMkLst>
             <pc:docMk/>
             <pc:sldMk cId="1030600834" sldId="258"/>
@@ -804,14 +380,6 @@
             <pc:docMk/>
             <pc:sldMk cId="425261687" sldId="259"/>
             <ac:spMk id="2" creationId="{11E3F92D-8555-03AD-3A5E-90E4BB6D839A}"/>
-          </ac:spMkLst>
-        </pc:spChg>
-        <pc:spChg chg="add del mod">
-          <ac:chgData name="Sofia Negueruela Avellaneda" userId="1355ce59-2ee3-4584-b6f2-c7e4b99958aa" providerId="ADAL" clId="{75AA7C8B-0E1E-45F8-BB8D-1CDD06E81B9F}" dt="2026-02-28T09:04:52.209" v="1568" actId="26606"/>
-          <ac:spMkLst>
-            <pc:docMk/>
-            <pc:sldMk cId="425261687" sldId="259"/>
-            <ac:spMk id="3" creationId="{7D5FC0D9-1A6B-A1D9-7D4A-F4CD699524FC}"/>
           </ac:spMkLst>
         </pc:spChg>
         <pc:spChg chg="add">
@@ -838,14 +406,6 @@
             <ac:spMk id="8" creationId="{AAD0DBB9-1A4B-4391-81D4-CB19F9AB918A}"/>
           </ac:spMkLst>
         </pc:spChg>
-        <pc:spChg chg="add del">
-          <ac:chgData name="Sofia Negueruela Avellaneda" userId="1355ce59-2ee3-4584-b6f2-c7e4b99958aa" providerId="ADAL" clId="{75AA7C8B-0E1E-45F8-BB8D-1CDD06E81B9F}" dt="2026-02-28T09:04:50.706" v="1567" actId="26606"/>
-          <ac:spMkLst>
-            <pc:docMk/>
-            <pc:sldMk cId="425261687" sldId="259"/>
-            <ac:spMk id="9" creationId="{BACC6370-2D7E-4714-9D71-7542949D7D5D}"/>
-          </ac:spMkLst>
-        </pc:spChg>
         <pc:spChg chg="add">
           <ac:chgData name="Sofia Negueruela Avellaneda" userId="1355ce59-2ee3-4584-b6f2-c7e4b99958aa" providerId="ADAL" clId="{75AA7C8B-0E1E-45F8-BB8D-1CDD06E81B9F}" dt="2026-02-28T09:04:52.209" v="1568" actId="26606"/>
           <ac:spMkLst>
@@ -854,38 +414,6 @@
             <ac:spMk id="10" creationId="{063BBA22-50EA-4C4D-BE05-F1CE4E63AA56}"/>
           </ac:spMkLst>
         </pc:spChg>
-        <pc:spChg chg="add del">
-          <ac:chgData name="Sofia Negueruela Avellaneda" userId="1355ce59-2ee3-4584-b6f2-c7e4b99958aa" providerId="ADAL" clId="{75AA7C8B-0E1E-45F8-BB8D-1CDD06E81B9F}" dt="2026-02-28T09:04:50.706" v="1567" actId="26606"/>
-          <ac:spMkLst>
-            <pc:docMk/>
-            <pc:sldMk cId="425261687" sldId="259"/>
-            <ac:spMk id="11" creationId="{F68B3F68-107C-434F-AA38-110D5EA91B85}"/>
-          </ac:spMkLst>
-        </pc:spChg>
-        <pc:spChg chg="add del">
-          <ac:chgData name="Sofia Negueruela Avellaneda" userId="1355ce59-2ee3-4584-b6f2-c7e4b99958aa" providerId="ADAL" clId="{75AA7C8B-0E1E-45F8-BB8D-1CDD06E81B9F}" dt="2026-02-28T09:04:50.706" v="1567" actId="26606"/>
-          <ac:spMkLst>
-            <pc:docMk/>
-            <pc:sldMk cId="425261687" sldId="259"/>
-            <ac:spMk id="13" creationId="{AAD0DBB9-1A4B-4391-81D4-CB19F9AB918A}"/>
-          </ac:spMkLst>
-        </pc:spChg>
-        <pc:spChg chg="add del">
-          <ac:chgData name="Sofia Negueruela Avellaneda" userId="1355ce59-2ee3-4584-b6f2-c7e4b99958aa" providerId="ADAL" clId="{75AA7C8B-0E1E-45F8-BB8D-1CDD06E81B9F}" dt="2026-02-28T09:04:50.706" v="1567" actId="26606"/>
-          <ac:spMkLst>
-            <pc:docMk/>
-            <pc:sldMk cId="425261687" sldId="259"/>
-            <ac:spMk id="15" creationId="{063BBA22-50EA-4C4D-BE05-F1CE4E63AA56}"/>
-          </ac:spMkLst>
-        </pc:spChg>
-        <pc:graphicFrameChg chg="add del">
-          <ac:chgData name="Sofia Negueruela Avellaneda" userId="1355ce59-2ee3-4584-b6f2-c7e4b99958aa" providerId="ADAL" clId="{75AA7C8B-0E1E-45F8-BB8D-1CDD06E81B9F}" dt="2026-02-28T09:04:50.706" v="1567" actId="26606"/>
-          <ac:graphicFrameMkLst>
-            <pc:docMk/>
-            <pc:sldMk cId="425261687" sldId="259"/>
-            <ac:graphicFrameMk id="5" creationId="{5C1E40B6-843E-2169-5EAB-28868D106B4D}"/>
-          </ac:graphicFrameMkLst>
-        </pc:graphicFrameChg>
         <pc:graphicFrameChg chg="add mod modGraphic">
           <ac:chgData name="Sofia Negueruela Avellaneda" userId="1355ce59-2ee3-4584-b6f2-c7e4b99958aa" providerId="ADAL" clId="{75AA7C8B-0E1E-45F8-BB8D-1CDD06E81B9F}" dt="2026-02-28T09:06:56.630" v="1581" actId="20577"/>
           <ac:graphicFrameMkLst>
@@ -895,8 +423,8 @@
           </ac:graphicFrameMkLst>
         </pc:graphicFrameChg>
       </pc:sldChg>
-      <pc:sldChg chg="addSp delSp modSp new mod setBg">
-        <pc:chgData name="Sofia Negueruela Avellaneda" userId="1355ce59-2ee3-4584-b6f2-c7e4b99958aa" providerId="ADAL" clId="{75AA7C8B-0E1E-45F8-BB8D-1CDD06E81B9F}" dt="2026-02-28T08:58:22.796" v="1378" actId="1076"/>
+      <pc:sldChg chg="addSp delSp modSp new mod setBg modShow">
+        <pc:chgData name="Sofia Negueruela Avellaneda" userId="1355ce59-2ee3-4584-b6f2-c7e4b99958aa" providerId="ADAL" clId="{75AA7C8B-0E1E-45F8-BB8D-1CDD06E81B9F}" dt="2026-03-02T18:40:33.724" v="1896" actId="729"/>
         <pc:sldMkLst>
           <pc:docMk/>
           <pc:sldMk cId="3677430290" sldId="260"/>
@@ -909,284 +437,12 @@
             <ac:spMk id="2" creationId="{616347DB-7E3C-F1FE-8DA5-65B5F9DDC63E}"/>
           </ac:spMkLst>
         </pc:spChg>
-        <pc:spChg chg="add del mod ord">
-          <ac:chgData name="Sofia Negueruela Avellaneda" userId="1355ce59-2ee3-4584-b6f2-c7e4b99958aa" providerId="ADAL" clId="{75AA7C8B-0E1E-45F8-BB8D-1CDD06E81B9F}" dt="2026-02-28T08:53:19.237" v="1206" actId="26606"/>
-          <ac:spMkLst>
-            <pc:docMk/>
-            <pc:sldMk cId="3677430290" sldId="260"/>
-            <ac:spMk id="3" creationId="{6D02149F-2562-ABEE-028C-3047359DC576}"/>
-          </ac:spMkLst>
-        </pc:spChg>
-        <pc:spChg chg="add del">
-          <ac:chgData name="Sofia Negueruela Avellaneda" userId="1355ce59-2ee3-4584-b6f2-c7e4b99958aa" providerId="ADAL" clId="{75AA7C8B-0E1E-45F8-BB8D-1CDD06E81B9F}" dt="2026-02-28T08:51:54.046" v="1191" actId="478"/>
-          <ac:spMkLst>
-            <pc:docMk/>
-            <pc:sldMk cId="3677430290" sldId="260"/>
-            <ac:spMk id="4" creationId="{F70CB1D3-B8CB-BA37-1429-DCB5537D645F}"/>
-          </ac:spMkLst>
-        </pc:spChg>
-        <pc:spChg chg="add del mod">
-          <ac:chgData name="Sofia Negueruela Avellaneda" userId="1355ce59-2ee3-4584-b6f2-c7e4b99958aa" providerId="ADAL" clId="{75AA7C8B-0E1E-45F8-BB8D-1CDD06E81B9F}" dt="2026-02-28T08:51:54.046" v="1191" actId="478"/>
-          <ac:spMkLst>
-            <pc:docMk/>
-            <pc:sldMk cId="3677430290" sldId="260"/>
-            <ac:spMk id="6" creationId="{0B08553E-711D-F02E-E798-1F209FD0E23B}"/>
-          </ac:spMkLst>
-        </pc:spChg>
-        <pc:spChg chg="add del">
-          <ac:chgData name="Sofia Negueruela Avellaneda" userId="1355ce59-2ee3-4584-b6f2-c7e4b99958aa" providerId="ADAL" clId="{75AA7C8B-0E1E-45F8-BB8D-1CDD06E81B9F}" dt="2026-02-28T08:52:04.169" v="1193" actId="478"/>
-          <ac:spMkLst>
-            <pc:docMk/>
-            <pc:sldMk cId="3677430290" sldId="260"/>
-            <ac:spMk id="7" creationId="{7960364F-4D1E-13A9-1EDE-4F5BD6A3BD9B}"/>
-          </ac:spMkLst>
-        </pc:spChg>
-        <pc:spChg chg="add del">
-          <ac:chgData name="Sofia Negueruela Avellaneda" userId="1355ce59-2ee3-4584-b6f2-c7e4b99958aa" providerId="ADAL" clId="{75AA7C8B-0E1E-45F8-BB8D-1CDD06E81B9F}" dt="2026-02-28T08:49:22.882" v="1180" actId="26606"/>
-          <ac:spMkLst>
-            <pc:docMk/>
-            <pc:sldMk cId="3677430290" sldId="260"/>
-            <ac:spMk id="8" creationId="{5A0118C5-4F8D-4CF4-BADD-53FEACC6C42A}"/>
-          </ac:spMkLst>
-        </pc:spChg>
-        <pc:spChg chg="add del">
-          <ac:chgData name="Sofia Negueruela Avellaneda" userId="1355ce59-2ee3-4584-b6f2-c7e4b99958aa" providerId="ADAL" clId="{75AA7C8B-0E1E-45F8-BB8D-1CDD06E81B9F}" dt="2026-02-28T08:43:43.589" v="1170" actId="26606"/>
-          <ac:spMkLst>
-            <pc:docMk/>
-            <pc:sldMk cId="3677430290" sldId="260"/>
-            <ac:spMk id="9" creationId="{BACC6370-2D7E-4714-9D71-7542949D7D5D}"/>
-          </ac:spMkLst>
-        </pc:spChg>
-        <pc:spChg chg="add del">
-          <ac:chgData name="Sofia Negueruela Avellaneda" userId="1355ce59-2ee3-4584-b6f2-c7e4b99958aa" providerId="ADAL" clId="{75AA7C8B-0E1E-45F8-BB8D-1CDD06E81B9F}" dt="2026-02-28T08:49:22.882" v="1180" actId="26606"/>
-          <ac:spMkLst>
-            <pc:docMk/>
-            <pc:sldMk cId="3677430290" sldId="260"/>
-            <ac:spMk id="10" creationId="{4E0A5C5C-2A95-428E-9F6A-0D29EBD57C9F}"/>
-          </ac:spMkLst>
-        </pc:spChg>
-        <pc:spChg chg="add del">
-          <ac:chgData name="Sofia Negueruela Avellaneda" userId="1355ce59-2ee3-4584-b6f2-c7e4b99958aa" providerId="ADAL" clId="{75AA7C8B-0E1E-45F8-BB8D-1CDD06E81B9F}" dt="2026-02-28T08:43:43.589" v="1170" actId="26606"/>
-          <ac:spMkLst>
-            <pc:docMk/>
-            <pc:sldMk cId="3677430290" sldId="260"/>
-            <ac:spMk id="11" creationId="{256B2C21-A230-48C0-8DF1-C46611373C44}"/>
-          </ac:spMkLst>
-        </pc:spChg>
-        <pc:spChg chg="add del">
-          <ac:chgData name="Sofia Negueruela Avellaneda" userId="1355ce59-2ee3-4584-b6f2-c7e4b99958aa" providerId="ADAL" clId="{75AA7C8B-0E1E-45F8-BB8D-1CDD06E81B9F}" dt="2026-02-28T08:49:22.452" v="1179" actId="26606"/>
-          <ac:spMkLst>
-            <pc:docMk/>
-            <pc:sldMk cId="3677430290" sldId="260"/>
-            <ac:spMk id="12" creationId="{1056F38F-7C4E-461D-8709-7D0024AE1F79}"/>
-          </ac:spMkLst>
-        </pc:spChg>
-        <pc:spChg chg="add del">
-          <ac:chgData name="Sofia Negueruela Avellaneda" userId="1355ce59-2ee3-4584-b6f2-c7e4b99958aa" providerId="ADAL" clId="{75AA7C8B-0E1E-45F8-BB8D-1CDD06E81B9F}" dt="2026-02-28T08:43:43.589" v="1170" actId="26606"/>
-          <ac:spMkLst>
-            <pc:docMk/>
-            <pc:sldMk cId="3677430290" sldId="260"/>
-            <ac:spMk id="13" creationId="{3847E18C-932D-4C95-AABA-FEC7C9499AD7}"/>
-          </ac:spMkLst>
-        </pc:spChg>
-        <pc:spChg chg="add del">
-          <ac:chgData name="Sofia Negueruela Avellaneda" userId="1355ce59-2ee3-4584-b6f2-c7e4b99958aa" providerId="ADAL" clId="{75AA7C8B-0E1E-45F8-BB8D-1CDD06E81B9F}" dt="2026-02-28T08:49:22.882" v="1180" actId="26606"/>
-          <ac:spMkLst>
-            <pc:docMk/>
-            <pc:sldMk cId="3677430290" sldId="260"/>
-            <ac:spMk id="14" creationId="{C7278469-3C3C-49CE-AEEE-E176A4900B78}"/>
-          </ac:spMkLst>
-        </pc:spChg>
-        <pc:spChg chg="add del">
-          <ac:chgData name="Sofia Negueruela Avellaneda" userId="1355ce59-2ee3-4584-b6f2-c7e4b99958aa" providerId="ADAL" clId="{75AA7C8B-0E1E-45F8-BB8D-1CDD06E81B9F}" dt="2026-02-28T08:43:43.589" v="1170" actId="26606"/>
-          <ac:spMkLst>
-            <pc:docMk/>
-            <pc:sldMk cId="3677430290" sldId="260"/>
-            <ac:spMk id="15" creationId="{3150CB11-0C61-439E-910F-5787759E72A0}"/>
-          </ac:spMkLst>
-        </pc:spChg>
-        <pc:spChg chg="add del">
-          <ac:chgData name="Sofia Negueruela Avellaneda" userId="1355ce59-2ee3-4584-b6f2-c7e4b99958aa" providerId="ADAL" clId="{75AA7C8B-0E1E-45F8-BB8D-1CDD06E81B9F}" dt="2026-02-28T08:43:43.589" v="1170" actId="26606"/>
-          <ac:spMkLst>
-            <pc:docMk/>
-            <pc:sldMk cId="3677430290" sldId="260"/>
-            <ac:spMk id="17" creationId="{43F8A58B-5155-44CE-A5FF-7647B47D0A7A}"/>
-          </ac:spMkLst>
-        </pc:spChg>
-        <pc:spChg chg="add del">
-          <ac:chgData name="Sofia Negueruela Avellaneda" userId="1355ce59-2ee3-4584-b6f2-c7e4b99958aa" providerId="ADAL" clId="{75AA7C8B-0E1E-45F8-BB8D-1CDD06E81B9F}" dt="2026-02-28T08:43:43.589" v="1170" actId="26606"/>
-          <ac:spMkLst>
-            <pc:docMk/>
-            <pc:sldMk cId="3677430290" sldId="260"/>
-            <ac:spMk id="19" creationId="{443F2ACA-E6D6-4028-82DD-F03C262D5DE6}"/>
-          </ac:spMkLst>
-        </pc:spChg>
-        <pc:spChg chg="add del">
-          <ac:chgData name="Sofia Negueruela Avellaneda" userId="1355ce59-2ee3-4584-b6f2-c7e4b99958aa" providerId="ADAL" clId="{75AA7C8B-0E1E-45F8-BB8D-1CDD06E81B9F}" dt="2026-02-28T08:49:22.882" v="1180" actId="26606"/>
-          <ac:spMkLst>
-            <pc:docMk/>
-            <pc:sldMk cId="3677430290" sldId="260"/>
-            <ac:spMk id="20" creationId="{4C6598AB-1C17-4D54-951C-A082D94ACB7A}"/>
-          </ac:spMkLst>
-        </pc:spChg>
-        <pc:spChg chg="add del">
-          <ac:chgData name="Sofia Negueruela Avellaneda" userId="1355ce59-2ee3-4584-b6f2-c7e4b99958aa" providerId="ADAL" clId="{75AA7C8B-0E1E-45F8-BB8D-1CDD06E81B9F}" dt="2026-02-28T08:49:22.882" v="1180" actId="26606"/>
-          <ac:spMkLst>
-            <pc:docMk/>
-            <pc:sldMk cId="3677430290" sldId="260"/>
-            <ac:spMk id="22" creationId="{C83B66D7-137D-4AC1-B172-53D60F08BEB5}"/>
-          </ac:spMkLst>
-        </pc:spChg>
-        <pc:spChg chg="add del">
-          <ac:chgData name="Sofia Negueruela Avellaneda" userId="1355ce59-2ee3-4584-b6f2-c7e4b99958aa" providerId="ADAL" clId="{75AA7C8B-0E1E-45F8-BB8D-1CDD06E81B9F}" dt="2026-02-28T08:49:22.882" v="1180" actId="26606"/>
-          <ac:spMkLst>
-            <pc:docMk/>
-            <pc:sldMk cId="3677430290" sldId="260"/>
-            <ac:spMk id="24" creationId="{F6B92503-6984-4D15-8B98-8718709B785D}"/>
-          </ac:spMkLst>
-        </pc:spChg>
-        <pc:spChg chg="add del mod">
-          <ac:chgData name="Sofia Negueruela Avellaneda" userId="1355ce59-2ee3-4584-b6f2-c7e4b99958aa" providerId="ADAL" clId="{75AA7C8B-0E1E-45F8-BB8D-1CDD06E81B9F}" dt="2026-02-28T08:49:22.882" v="1180" actId="26606"/>
-          <ac:spMkLst>
-            <pc:docMk/>
-            <pc:sldMk cId="3677430290" sldId="260"/>
-            <ac:spMk id="25" creationId="{6D02149F-2562-ABEE-028C-3047359DC576}"/>
-          </ac:spMkLst>
-        </pc:spChg>
-        <pc:spChg chg="add del">
-          <ac:chgData name="Sofia Negueruela Avellaneda" userId="1355ce59-2ee3-4584-b6f2-c7e4b99958aa" providerId="ADAL" clId="{75AA7C8B-0E1E-45F8-BB8D-1CDD06E81B9F}" dt="2026-02-28T08:49:22.882" v="1180" actId="26606"/>
-          <ac:spMkLst>
-            <pc:docMk/>
-            <pc:sldMk cId="3677430290" sldId="260"/>
-            <ac:spMk id="26" creationId="{08DDF938-524E-4C18-A47D-C00627832366}"/>
-          </ac:spMkLst>
-        </pc:spChg>
-        <pc:spChg chg="del">
-          <ac:chgData name="Sofia Negueruela Avellaneda" userId="1355ce59-2ee3-4584-b6f2-c7e4b99958aa" providerId="ADAL" clId="{75AA7C8B-0E1E-45F8-BB8D-1CDD06E81B9F}" dt="2026-02-28T08:49:22.452" v="1179" actId="26606"/>
-          <ac:spMkLst>
-            <pc:docMk/>
-            <pc:sldMk cId="3677430290" sldId="260"/>
-            <ac:spMk id="39" creationId="{56E9B3E6-E277-4D68-BA48-9CB43FFBD6E2}"/>
-          </ac:spMkLst>
-        </pc:spChg>
-        <pc:spChg chg="add del">
-          <ac:chgData name="Sofia Negueruela Avellaneda" userId="1355ce59-2ee3-4584-b6f2-c7e4b99958aa" providerId="ADAL" clId="{75AA7C8B-0E1E-45F8-BB8D-1CDD06E81B9F}" dt="2026-02-28T08:44:35.306" v="1175" actId="26606"/>
-          <ac:spMkLst>
-            <pc:docMk/>
-            <pc:sldMk cId="3677430290" sldId="260"/>
-            <ac:spMk id="42" creationId="{CD9FE4EF-C4D8-49A0-B2FF-81D8DB7D8A24}"/>
-          </ac:spMkLst>
-        </pc:spChg>
-        <pc:spChg chg="add del">
-          <ac:chgData name="Sofia Negueruela Avellaneda" userId="1355ce59-2ee3-4584-b6f2-c7e4b99958aa" providerId="ADAL" clId="{75AA7C8B-0E1E-45F8-BB8D-1CDD06E81B9F}" dt="2026-02-28T08:44:35.306" v="1175" actId="26606"/>
-          <ac:spMkLst>
-            <pc:docMk/>
-            <pc:sldMk cId="3677430290" sldId="260"/>
-            <ac:spMk id="46" creationId="{D2B78728-A580-49A7-84F9-6EF6F583ADE0}"/>
-          </ac:spMkLst>
-        </pc:spChg>
-        <pc:spChg chg="add del">
-          <ac:chgData name="Sofia Negueruela Avellaneda" userId="1355ce59-2ee3-4584-b6f2-c7e4b99958aa" providerId="ADAL" clId="{75AA7C8B-0E1E-45F8-BB8D-1CDD06E81B9F}" dt="2026-02-28T08:44:35.306" v="1175" actId="26606"/>
-          <ac:spMkLst>
-            <pc:docMk/>
-            <pc:sldMk cId="3677430290" sldId="260"/>
-            <ac:spMk id="48" creationId="{38FAA1A1-D861-433F-88FA-1E9D6FD31D11}"/>
-          </ac:spMkLst>
-        </pc:spChg>
-        <pc:spChg chg="add del">
-          <ac:chgData name="Sofia Negueruela Avellaneda" userId="1355ce59-2ee3-4584-b6f2-c7e4b99958aa" providerId="ADAL" clId="{75AA7C8B-0E1E-45F8-BB8D-1CDD06E81B9F}" dt="2026-02-28T08:44:35.306" v="1175" actId="26606"/>
-          <ac:spMkLst>
-            <pc:docMk/>
-            <pc:sldMk cId="3677430290" sldId="260"/>
-            <ac:spMk id="50" creationId="{8D71EDA1-87BF-4D5D-AB79-F346FD19278A}"/>
-          </ac:spMkLst>
-        </pc:spChg>
-        <pc:spChg chg="add del">
-          <ac:chgData name="Sofia Negueruela Avellaneda" userId="1355ce59-2ee3-4584-b6f2-c7e4b99958aa" providerId="ADAL" clId="{75AA7C8B-0E1E-45F8-BB8D-1CDD06E81B9F}" dt="2026-02-28T08:44:54.464" v="1177" actId="26606"/>
-          <ac:spMkLst>
-            <pc:docMk/>
-            <pc:sldMk cId="3677430290" sldId="260"/>
-            <ac:spMk id="52" creationId="{3AD318CC-E2A8-4E27-9548-A047A78999B1}"/>
-          </ac:spMkLst>
-        </pc:spChg>
-        <pc:spChg chg="add del">
-          <ac:chgData name="Sofia Negueruela Avellaneda" userId="1355ce59-2ee3-4584-b6f2-c7e4b99958aa" providerId="ADAL" clId="{75AA7C8B-0E1E-45F8-BB8D-1CDD06E81B9F}" dt="2026-02-28T08:44:54.464" v="1177" actId="26606"/>
-          <ac:spMkLst>
-            <pc:docMk/>
-            <pc:sldMk cId="3677430290" sldId="260"/>
-            <ac:spMk id="55" creationId="{2C1BBA94-3F40-40AA-8BB9-E69E25E537C1}"/>
-          </ac:spMkLst>
-        </pc:spChg>
-        <pc:spChg chg="add del">
-          <ac:chgData name="Sofia Negueruela Avellaneda" userId="1355ce59-2ee3-4584-b6f2-c7e4b99958aa" providerId="ADAL" clId="{75AA7C8B-0E1E-45F8-BB8D-1CDD06E81B9F}" dt="2026-02-28T08:49:22.452" v="1179" actId="26606"/>
-          <ac:spMkLst>
-            <pc:docMk/>
-            <pc:sldMk cId="3677430290" sldId="260"/>
-            <ac:spMk id="60" creationId="{D5B0017B-2ECA-49AF-B397-DC140825DF8D}"/>
-          </ac:spMkLst>
-        </pc:spChg>
-        <pc:spChg chg="add del">
-          <ac:chgData name="Sofia Negueruela Avellaneda" userId="1355ce59-2ee3-4584-b6f2-c7e4b99958aa" providerId="ADAL" clId="{75AA7C8B-0E1E-45F8-BB8D-1CDD06E81B9F}" dt="2026-02-28T08:52:55.091" v="1199" actId="26606"/>
-          <ac:spMkLst>
-            <pc:docMk/>
-            <pc:sldMk cId="3677430290" sldId="260"/>
-            <ac:spMk id="3091" creationId="{959C6B72-F8E6-4281-8F3E-93FC0DC98039}"/>
-          </ac:spMkLst>
-        </pc:spChg>
-        <pc:spChg chg="add del">
-          <ac:chgData name="Sofia Negueruela Avellaneda" userId="1355ce59-2ee3-4584-b6f2-c7e4b99958aa" providerId="ADAL" clId="{75AA7C8B-0E1E-45F8-BB8D-1CDD06E81B9F}" dt="2026-02-28T08:52:55.091" v="1199" actId="26606"/>
-          <ac:spMkLst>
-            <pc:docMk/>
-            <pc:sldMk cId="3677430290" sldId="260"/>
-            <ac:spMk id="3093" creationId="{490234EE-E0D8-4805-9227-CCEAC601691F}"/>
-          </ac:spMkLst>
-        </pc:spChg>
-        <pc:spChg chg="add del">
-          <ac:chgData name="Sofia Negueruela Avellaneda" userId="1355ce59-2ee3-4584-b6f2-c7e4b99958aa" providerId="ADAL" clId="{75AA7C8B-0E1E-45F8-BB8D-1CDD06E81B9F}" dt="2026-02-28T08:52:59.172" v="1203" actId="26606"/>
-          <ac:spMkLst>
-            <pc:docMk/>
-            <pc:sldMk cId="3677430290" sldId="260"/>
-            <ac:spMk id="3095" creationId="{758C3C99-2F64-46DC-9F81-BAA40930E163}"/>
-          </ac:spMkLst>
-        </pc:spChg>
-        <pc:spChg chg="add del">
-          <ac:chgData name="Sofia Negueruela Avellaneda" userId="1355ce59-2ee3-4584-b6f2-c7e4b99958aa" providerId="ADAL" clId="{75AA7C8B-0E1E-45F8-BB8D-1CDD06E81B9F}" dt="2026-02-28T08:52:59.172" v="1203" actId="26606"/>
-          <ac:spMkLst>
-            <pc:docMk/>
-            <pc:sldMk cId="3677430290" sldId="260"/>
-            <ac:spMk id="3096" creationId="{50D1C5B3-B60D-4696-AE60-100D5EC8AB5D}"/>
-          </ac:spMkLst>
-        </pc:spChg>
-        <pc:spChg chg="add del">
-          <ac:chgData name="Sofia Negueruela Avellaneda" userId="1355ce59-2ee3-4584-b6f2-c7e4b99958aa" providerId="ADAL" clId="{75AA7C8B-0E1E-45F8-BB8D-1CDD06E81B9F}" dt="2026-02-28T08:52:59.172" v="1203" actId="26606"/>
-          <ac:spMkLst>
-            <pc:docMk/>
-            <pc:sldMk cId="3677430290" sldId="260"/>
-            <ac:spMk id="3097" creationId="{FA169C72-4010-413C-A913-4BD6E2D1291A}"/>
-          </ac:spMkLst>
-        </pc:spChg>
-        <pc:graphicFrameChg chg="add del">
-          <ac:chgData name="Sofia Negueruela Avellaneda" userId="1355ce59-2ee3-4584-b6f2-c7e4b99958aa" providerId="ADAL" clId="{75AA7C8B-0E1E-45F8-BB8D-1CDD06E81B9F}" dt="2026-02-28T08:43:43.589" v="1170" actId="26606"/>
-          <ac:graphicFrameMkLst>
-            <pc:docMk/>
-            <pc:sldMk cId="3677430290" sldId="260"/>
-            <ac:graphicFrameMk id="5" creationId="{A0941E9C-E460-EDCA-C200-4462C44D2D10}"/>
-          </ac:graphicFrameMkLst>
-        </pc:graphicFrameChg>
         <pc:graphicFrameChg chg="add mod">
           <ac:chgData name="Sofia Negueruela Avellaneda" userId="1355ce59-2ee3-4584-b6f2-c7e4b99958aa" providerId="ADAL" clId="{75AA7C8B-0E1E-45F8-BB8D-1CDD06E81B9F}" dt="2026-02-28T08:58:22.796" v="1378" actId="1076"/>
           <ac:graphicFrameMkLst>
             <pc:docMk/>
             <pc:sldMk cId="3677430290" sldId="260"/>
             <ac:graphicFrameMk id="18" creationId="{FFA7EFE8-EA38-12FD-3D40-36B2CE82C567}"/>
-          </ac:graphicFrameMkLst>
-        </pc:graphicFrameChg>
-        <pc:graphicFrameChg chg="add del">
-          <ac:chgData name="Sofia Negueruela Avellaneda" userId="1355ce59-2ee3-4584-b6f2-c7e4b99958aa" providerId="ADAL" clId="{75AA7C8B-0E1E-45F8-BB8D-1CDD06E81B9F}" dt="2026-02-28T08:43:50.826" v="1172" actId="26606"/>
-          <ac:graphicFrameMkLst>
-            <pc:docMk/>
-            <pc:sldMk cId="3677430290" sldId="260"/>
-            <ac:graphicFrameMk id="21" creationId="{68B74B2D-4F29-9ABC-F723-B882A170ECAB}"/>
           </ac:graphicFrameMkLst>
         </pc:graphicFrameChg>
         <pc:picChg chg="add mod">
@@ -1213,41 +469,9 @@
             <ac:picMk id="36" creationId="{744676F7-EC39-0C5D-2C1D-336A58715011}"/>
           </ac:picMkLst>
         </pc:picChg>
-        <pc:picChg chg="add del">
-          <ac:chgData name="Sofia Negueruela Avellaneda" userId="1355ce59-2ee3-4584-b6f2-c7e4b99958aa" providerId="ADAL" clId="{75AA7C8B-0E1E-45F8-BB8D-1CDD06E81B9F}" dt="2026-02-28T08:50:09.821" v="1182" actId="478"/>
-          <ac:picMkLst>
-            <pc:docMk/>
-            <pc:sldMk cId="3677430290" sldId="260"/>
-            <ac:picMk id="3074" creationId="{03CACF26-C8E2-5237-50DF-53C18D2A282B}"/>
-          </ac:picMkLst>
-        </pc:picChg>
-        <pc:picChg chg="add del mod">
-          <ac:chgData name="Sofia Negueruela Avellaneda" userId="1355ce59-2ee3-4584-b6f2-c7e4b99958aa" providerId="ADAL" clId="{75AA7C8B-0E1E-45F8-BB8D-1CDD06E81B9F}" dt="2026-02-28T08:53:05.433" v="1205" actId="21"/>
-          <ac:picMkLst>
-            <pc:docMk/>
-            <pc:sldMk cId="3677430290" sldId="260"/>
-            <ac:picMk id="3076" creationId="{81C8CF74-07A9-8E7A-C2D3-6A22004815C1}"/>
-          </ac:picMkLst>
-        </pc:picChg>
-        <pc:picChg chg="add del mod">
-          <ac:chgData name="Sofia Negueruela Avellaneda" userId="1355ce59-2ee3-4584-b6f2-c7e4b99958aa" providerId="ADAL" clId="{75AA7C8B-0E1E-45F8-BB8D-1CDD06E81B9F}" dt="2026-02-28T08:53:05.433" v="1205" actId="21"/>
-          <ac:picMkLst>
-            <pc:docMk/>
-            <pc:sldMk cId="3677430290" sldId="260"/>
-            <ac:picMk id="3078" creationId="{54E43329-3D0D-E460-3628-1A3BD47EA969}"/>
-          </ac:picMkLst>
-        </pc:picChg>
-        <pc:picChg chg="add del mod ord">
-          <ac:chgData name="Sofia Negueruela Avellaneda" userId="1355ce59-2ee3-4584-b6f2-c7e4b99958aa" providerId="ADAL" clId="{75AA7C8B-0E1E-45F8-BB8D-1CDD06E81B9F}" dt="2026-02-28T08:53:05.433" v="1205" actId="21"/>
-          <ac:picMkLst>
-            <pc:docMk/>
-            <pc:sldMk cId="3677430290" sldId="260"/>
-            <ac:picMk id="3086" creationId="{744676F7-EC39-0C5D-2C1D-336A58715011}"/>
-          </ac:picMkLst>
-        </pc:picChg>
       </pc:sldChg>
       <pc:sldChg chg="addSp delSp modSp new mod setBg">
-        <pc:chgData name="Sofia Negueruela Avellaneda" userId="1355ce59-2ee3-4584-b6f2-c7e4b99958aa" providerId="ADAL" clId="{75AA7C8B-0E1E-45F8-BB8D-1CDD06E81B9F}" dt="2026-02-28T09:15:30.845" v="1820" actId="12100"/>
+        <pc:chgData name="Sofia Negueruela Avellaneda" userId="1355ce59-2ee3-4584-b6f2-c7e4b99958aa" providerId="ADAL" clId="{75AA7C8B-0E1E-45F8-BB8D-1CDD06E81B9F}" dt="2026-03-02T18:40:59.329" v="1942" actId="20577"/>
         <pc:sldMkLst>
           <pc:docMk/>
           <pc:sldMk cId="2168037090" sldId="261"/>
@@ -1260,38 +484,6 @@
             <ac:spMk id="2" creationId="{FE66AD63-0932-AD98-022F-899963987123}"/>
           </ac:spMkLst>
         </pc:spChg>
-        <pc:spChg chg="del mod ord">
-          <ac:chgData name="Sofia Negueruela Avellaneda" userId="1355ce59-2ee3-4584-b6f2-c7e4b99958aa" providerId="ADAL" clId="{75AA7C8B-0E1E-45F8-BB8D-1CDD06E81B9F}" dt="2026-02-28T09:14:15.707" v="1811" actId="478"/>
-          <ac:spMkLst>
-            <pc:docMk/>
-            <pc:sldMk cId="2168037090" sldId="261"/>
-            <ac:spMk id="3" creationId="{CF57DAB6-8020-7C09-2406-E01EA3F5EEBA}"/>
-          </ac:spMkLst>
-        </pc:spChg>
-        <pc:spChg chg="add del">
-          <ac:chgData name="Sofia Negueruela Avellaneda" userId="1355ce59-2ee3-4584-b6f2-c7e4b99958aa" providerId="ADAL" clId="{75AA7C8B-0E1E-45F8-BB8D-1CDD06E81B9F}" dt="2026-02-28T09:12:43.882" v="1801" actId="26606"/>
-          <ac:spMkLst>
-            <pc:docMk/>
-            <pc:sldMk cId="2168037090" sldId="261"/>
-            <ac:spMk id="10" creationId="{2596F992-698C-48C0-9D89-70DA4CE927EF}"/>
-          </ac:spMkLst>
-        </pc:spChg>
-        <pc:spChg chg="add del mod">
-          <ac:chgData name="Sofia Negueruela Avellaneda" userId="1355ce59-2ee3-4584-b6f2-c7e4b99958aa" providerId="ADAL" clId="{75AA7C8B-0E1E-45F8-BB8D-1CDD06E81B9F}" dt="2026-02-28T09:14:18.023" v="1813" actId="478"/>
-          <ac:spMkLst>
-            <pc:docMk/>
-            <pc:sldMk cId="2168037090" sldId="261"/>
-            <ac:spMk id="11" creationId="{8124F0CA-BDA7-76A7-AF23-C9DE8AA83273}"/>
-          </ac:spMkLst>
-        </pc:spChg>
-        <pc:spChg chg="add del">
-          <ac:chgData name="Sofia Negueruela Avellaneda" userId="1355ce59-2ee3-4584-b6f2-c7e4b99958aa" providerId="ADAL" clId="{75AA7C8B-0E1E-45F8-BB8D-1CDD06E81B9F}" dt="2026-02-28T09:12:43.882" v="1801" actId="26606"/>
-          <ac:spMkLst>
-            <pc:docMk/>
-            <pc:sldMk cId="2168037090" sldId="261"/>
-            <ac:spMk id="12" creationId="{E7BFF8DC-0AE7-4AD2-9B28-2E5F26D62C30}"/>
-          </ac:spMkLst>
-        </pc:spChg>
         <pc:spChg chg="add">
           <ac:chgData name="Sofia Negueruela Avellaneda" userId="1355ce59-2ee3-4584-b6f2-c7e4b99958aa" providerId="ADAL" clId="{75AA7C8B-0E1E-45F8-BB8D-1CDD06E81B9F}" dt="2026-02-28T09:15:14.320" v="1819" actId="26606"/>
           <ac:spMkLst>
@@ -1300,46 +492,14 @@
             <ac:spMk id="13" creationId="{257363FD-7E77-4145-9483-331A807ADF0E}"/>
           </ac:spMkLst>
         </pc:spChg>
-        <pc:spChg chg="add del">
-          <ac:chgData name="Sofia Negueruela Avellaneda" userId="1355ce59-2ee3-4584-b6f2-c7e4b99958aa" providerId="ADAL" clId="{75AA7C8B-0E1E-45F8-BB8D-1CDD06E81B9F}" dt="2026-02-28T09:12:43.882" v="1801" actId="26606"/>
-          <ac:spMkLst>
-            <pc:docMk/>
-            <pc:sldMk cId="2168037090" sldId="261"/>
-            <ac:spMk id="14" creationId="{7E0162AD-C6E5-4BF8-A453-76ADB36877D3}"/>
-          </ac:spMkLst>
-        </pc:spChg>
         <pc:graphicFrameChg chg="add mod modGraphic">
-          <ac:chgData name="Sofia Negueruela Avellaneda" userId="1355ce59-2ee3-4584-b6f2-c7e4b99958aa" providerId="ADAL" clId="{75AA7C8B-0E1E-45F8-BB8D-1CDD06E81B9F}" dt="2026-02-28T09:15:30.845" v="1820" actId="12100"/>
+          <ac:chgData name="Sofia Negueruela Avellaneda" userId="1355ce59-2ee3-4584-b6f2-c7e4b99958aa" providerId="ADAL" clId="{75AA7C8B-0E1E-45F8-BB8D-1CDD06E81B9F}" dt="2026-03-02T18:40:59.329" v="1942" actId="20577"/>
           <ac:graphicFrameMkLst>
             <pc:docMk/>
             <pc:sldMk cId="2168037090" sldId="261"/>
             <ac:graphicFrameMk id="8" creationId="{66D59420-5E69-5A4D-F5AA-9E440A37E196}"/>
           </ac:graphicFrameMkLst>
         </pc:graphicFrameChg>
-        <pc:picChg chg="add del mod">
-          <ac:chgData name="Sofia Negueruela Avellaneda" userId="1355ce59-2ee3-4584-b6f2-c7e4b99958aa" providerId="ADAL" clId="{75AA7C8B-0E1E-45F8-BB8D-1CDD06E81B9F}" dt="2026-02-28T09:12:45.976" v="1802" actId="478"/>
-          <ac:picMkLst>
-            <pc:docMk/>
-            <pc:sldMk cId="2168037090" sldId="261"/>
-            <ac:picMk id="5" creationId="{24C8579C-8710-6178-8163-64765A5D04AB}"/>
-          </ac:picMkLst>
-        </pc:picChg>
-        <pc:picChg chg="add del mod">
-          <ac:chgData name="Sofia Negueruela Avellaneda" userId="1355ce59-2ee3-4584-b6f2-c7e4b99958aa" providerId="ADAL" clId="{75AA7C8B-0E1E-45F8-BB8D-1CDD06E81B9F}" dt="2026-02-28T09:12:43.435" v="1799" actId="22"/>
-          <ac:picMkLst>
-            <pc:docMk/>
-            <pc:sldMk cId="2168037090" sldId="261"/>
-            <ac:picMk id="7" creationId="{980B8FC3-702F-BBC6-E525-F86AA9AB0148}"/>
-          </ac:picMkLst>
-        </pc:picChg>
-        <pc:picChg chg="add del mod">
-          <ac:chgData name="Sofia Negueruela Avellaneda" userId="1355ce59-2ee3-4584-b6f2-c7e4b99958aa" providerId="ADAL" clId="{75AA7C8B-0E1E-45F8-BB8D-1CDD06E81B9F}" dt="2026-02-28T09:15:07.089" v="1818" actId="478"/>
-          <ac:picMkLst>
-            <pc:docMk/>
-            <pc:sldMk cId="2168037090" sldId="261"/>
-            <ac:picMk id="15" creationId="{11E2F8DD-96EC-3F98-B7D5-D43FCBE75C1D}"/>
-          </ac:picMkLst>
-        </pc:picChg>
       </pc:sldChg>
       <pc:sldChg chg="addSp delSp modSp new mod setBg">
         <pc:chgData name="Sofia Negueruela Avellaneda" userId="1355ce59-2ee3-4584-b6f2-c7e4b99958aa" providerId="ADAL" clId="{75AA7C8B-0E1E-45F8-BB8D-1CDD06E81B9F}" dt="2026-02-28T09:28:30.680" v="1878" actId="14100"/>
@@ -1353,150 +513,6 @@
             <pc:docMk/>
             <pc:sldMk cId="2728812356" sldId="262"/>
             <ac:spMk id="2" creationId="{F686147F-815A-DA68-1CCD-47FA928A498D}"/>
-          </ac:spMkLst>
-        </pc:spChg>
-        <pc:spChg chg="add del mod">
-          <ac:chgData name="Sofia Negueruela Avellaneda" userId="1355ce59-2ee3-4584-b6f2-c7e4b99958aa" providerId="ADAL" clId="{75AA7C8B-0E1E-45F8-BB8D-1CDD06E81B9F}" dt="2026-02-28T09:26:45.469" v="1857" actId="26606"/>
-          <ac:spMkLst>
-            <pc:docMk/>
-            <pc:sldMk cId="2728812356" sldId="262"/>
-            <ac:spMk id="3" creationId="{EF3248B0-48F1-C1BC-9114-3FA46E8E6B48}"/>
-          </ac:spMkLst>
-        </pc:spChg>
-        <pc:spChg chg="add del mod">
-          <ac:chgData name="Sofia Negueruela Avellaneda" userId="1355ce59-2ee3-4584-b6f2-c7e4b99958aa" providerId="ADAL" clId="{75AA7C8B-0E1E-45F8-BB8D-1CDD06E81B9F}" dt="2026-02-28T09:26:58.167" v="1865" actId="478"/>
-          <ac:spMkLst>
-            <pc:docMk/>
-            <pc:sldMk cId="2728812356" sldId="262"/>
-            <ac:spMk id="6" creationId="{60A17727-28C7-D90F-03B8-86431F471F7E}"/>
-          </ac:spMkLst>
-        </pc:spChg>
-        <pc:spChg chg="add del">
-          <ac:chgData name="Sofia Negueruela Avellaneda" userId="1355ce59-2ee3-4584-b6f2-c7e4b99958aa" providerId="ADAL" clId="{75AA7C8B-0E1E-45F8-BB8D-1CDD06E81B9F}" dt="2026-02-28T09:26:31.698" v="1854" actId="26606"/>
-          <ac:spMkLst>
-            <pc:docMk/>
-            <pc:sldMk cId="2728812356" sldId="262"/>
-            <ac:spMk id="9" creationId="{BACC6370-2D7E-4714-9D71-7542949D7D5D}"/>
-          </ac:spMkLst>
-        </pc:spChg>
-        <pc:spChg chg="add del">
-          <ac:chgData name="Sofia Negueruela Avellaneda" userId="1355ce59-2ee3-4584-b6f2-c7e4b99958aa" providerId="ADAL" clId="{75AA7C8B-0E1E-45F8-BB8D-1CDD06E81B9F}" dt="2026-02-28T09:26:31.698" v="1854" actId="26606"/>
-          <ac:spMkLst>
-            <pc:docMk/>
-            <pc:sldMk cId="2728812356" sldId="262"/>
-            <ac:spMk id="11" creationId="{F68B3F68-107C-434F-AA38-110D5EA91B85}"/>
-          </ac:spMkLst>
-        </pc:spChg>
-        <pc:spChg chg="add del">
-          <ac:chgData name="Sofia Negueruela Avellaneda" userId="1355ce59-2ee3-4584-b6f2-c7e4b99958aa" providerId="ADAL" clId="{75AA7C8B-0E1E-45F8-BB8D-1CDD06E81B9F}" dt="2026-02-28T09:26:31.698" v="1854" actId="26606"/>
-          <ac:spMkLst>
-            <pc:docMk/>
-            <pc:sldMk cId="2728812356" sldId="262"/>
-            <ac:spMk id="13" creationId="{AAD0DBB9-1A4B-4391-81D4-CB19F9AB918A}"/>
-          </ac:spMkLst>
-        </pc:spChg>
-        <pc:spChg chg="add del">
-          <ac:chgData name="Sofia Negueruela Avellaneda" userId="1355ce59-2ee3-4584-b6f2-c7e4b99958aa" providerId="ADAL" clId="{75AA7C8B-0E1E-45F8-BB8D-1CDD06E81B9F}" dt="2026-02-28T09:26:31.698" v="1854" actId="26606"/>
-          <ac:spMkLst>
-            <pc:docMk/>
-            <pc:sldMk cId="2728812356" sldId="262"/>
-            <ac:spMk id="15" creationId="{063BBA22-50EA-4C4D-BE05-F1CE4E63AA56}"/>
-          </ac:spMkLst>
-        </pc:spChg>
-        <pc:spChg chg="add del">
-          <ac:chgData name="Sofia Negueruela Avellaneda" userId="1355ce59-2ee3-4584-b6f2-c7e4b99958aa" providerId="ADAL" clId="{75AA7C8B-0E1E-45F8-BB8D-1CDD06E81B9F}" dt="2026-02-28T09:26:51.348" v="1859" actId="26606"/>
-          <ac:spMkLst>
-            <pc:docMk/>
-            <pc:sldMk cId="2728812356" sldId="262"/>
-            <ac:spMk id="22" creationId="{BACC6370-2D7E-4714-9D71-7542949D7D5D}"/>
-          </ac:spMkLst>
-        </pc:spChg>
-        <pc:spChg chg="add del">
-          <ac:chgData name="Sofia Negueruela Avellaneda" userId="1355ce59-2ee3-4584-b6f2-c7e4b99958aa" providerId="ADAL" clId="{75AA7C8B-0E1E-45F8-BB8D-1CDD06E81B9F}" dt="2026-02-28T09:26:51.348" v="1859" actId="26606"/>
-          <ac:spMkLst>
-            <pc:docMk/>
-            <pc:sldMk cId="2728812356" sldId="262"/>
-            <ac:spMk id="24" creationId="{F68B3F68-107C-434F-AA38-110D5EA91B85}"/>
-          </ac:spMkLst>
-        </pc:spChg>
-        <pc:spChg chg="add del">
-          <ac:chgData name="Sofia Negueruela Avellaneda" userId="1355ce59-2ee3-4584-b6f2-c7e4b99958aa" providerId="ADAL" clId="{75AA7C8B-0E1E-45F8-BB8D-1CDD06E81B9F}" dt="2026-02-28T09:26:51.348" v="1859" actId="26606"/>
-          <ac:spMkLst>
-            <pc:docMk/>
-            <pc:sldMk cId="2728812356" sldId="262"/>
-            <ac:spMk id="26" creationId="{AAD0DBB9-1A4B-4391-81D4-CB19F9AB918A}"/>
-          </ac:spMkLst>
-        </pc:spChg>
-        <pc:spChg chg="add del">
-          <ac:chgData name="Sofia Negueruela Avellaneda" userId="1355ce59-2ee3-4584-b6f2-c7e4b99958aa" providerId="ADAL" clId="{75AA7C8B-0E1E-45F8-BB8D-1CDD06E81B9F}" dt="2026-02-28T09:26:51.348" v="1859" actId="26606"/>
-          <ac:spMkLst>
-            <pc:docMk/>
-            <pc:sldMk cId="2728812356" sldId="262"/>
-            <ac:spMk id="28" creationId="{063BBA22-50EA-4C4D-BE05-F1CE4E63AA56}"/>
-          </ac:spMkLst>
-        </pc:spChg>
-        <pc:spChg chg="add del">
-          <ac:chgData name="Sofia Negueruela Avellaneda" userId="1355ce59-2ee3-4584-b6f2-c7e4b99958aa" providerId="ADAL" clId="{75AA7C8B-0E1E-45F8-BB8D-1CDD06E81B9F}" dt="2026-02-28T09:26:52.593" v="1861" actId="26606"/>
-          <ac:spMkLst>
-            <pc:docMk/>
-            <pc:sldMk cId="2728812356" sldId="262"/>
-            <ac:spMk id="30" creationId="{BACC6370-2D7E-4714-9D71-7542949D7D5D}"/>
-          </ac:spMkLst>
-        </pc:spChg>
-        <pc:spChg chg="add del">
-          <ac:chgData name="Sofia Negueruela Avellaneda" userId="1355ce59-2ee3-4584-b6f2-c7e4b99958aa" providerId="ADAL" clId="{75AA7C8B-0E1E-45F8-BB8D-1CDD06E81B9F}" dt="2026-02-28T09:26:52.593" v="1861" actId="26606"/>
-          <ac:spMkLst>
-            <pc:docMk/>
-            <pc:sldMk cId="2728812356" sldId="262"/>
-            <ac:spMk id="31" creationId="{F68B3F68-107C-434F-AA38-110D5EA91B85}"/>
-          </ac:spMkLst>
-        </pc:spChg>
-        <pc:spChg chg="add del">
-          <ac:chgData name="Sofia Negueruela Avellaneda" userId="1355ce59-2ee3-4584-b6f2-c7e4b99958aa" providerId="ADAL" clId="{75AA7C8B-0E1E-45F8-BB8D-1CDD06E81B9F}" dt="2026-02-28T09:26:52.593" v="1861" actId="26606"/>
-          <ac:spMkLst>
-            <pc:docMk/>
-            <pc:sldMk cId="2728812356" sldId="262"/>
-            <ac:spMk id="32" creationId="{AAD0DBB9-1A4B-4391-81D4-CB19F9AB918A}"/>
-          </ac:spMkLst>
-        </pc:spChg>
-        <pc:spChg chg="add del">
-          <ac:chgData name="Sofia Negueruela Avellaneda" userId="1355ce59-2ee3-4584-b6f2-c7e4b99958aa" providerId="ADAL" clId="{75AA7C8B-0E1E-45F8-BB8D-1CDD06E81B9F}" dt="2026-02-28T09:26:52.593" v="1861" actId="26606"/>
-          <ac:spMkLst>
-            <pc:docMk/>
-            <pc:sldMk cId="2728812356" sldId="262"/>
-            <ac:spMk id="33" creationId="{063BBA22-50EA-4C4D-BE05-F1CE4E63AA56}"/>
-          </ac:spMkLst>
-        </pc:spChg>
-        <pc:spChg chg="add del">
-          <ac:chgData name="Sofia Negueruela Avellaneda" userId="1355ce59-2ee3-4584-b6f2-c7e4b99958aa" providerId="ADAL" clId="{75AA7C8B-0E1E-45F8-BB8D-1CDD06E81B9F}" dt="2026-02-28T09:27:29.720" v="1871" actId="26606"/>
-          <ac:spMkLst>
-            <pc:docMk/>
-            <pc:sldMk cId="2728812356" sldId="262"/>
-            <ac:spMk id="35" creationId="{BACC6370-2D7E-4714-9D71-7542949D7D5D}"/>
-          </ac:spMkLst>
-        </pc:spChg>
-        <pc:spChg chg="add del">
-          <ac:chgData name="Sofia Negueruela Avellaneda" userId="1355ce59-2ee3-4584-b6f2-c7e4b99958aa" providerId="ADAL" clId="{75AA7C8B-0E1E-45F8-BB8D-1CDD06E81B9F}" dt="2026-02-28T09:27:29.720" v="1871" actId="26606"/>
-          <ac:spMkLst>
-            <pc:docMk/>
-            <pc:sldMk cId="2728812356" sldId="262"/>
-            <ac:spMk id="36" creationId="{F68B3F68-107C-434F-AA38-110D5EA91B85}"/>
-          </ac:spMkLst>
-        </pc:spChg>
-        <pc:spChg chg="add del">
-          <ac:chgData name="Sofia Negueruela Avellaneda" userId="1355ce59-2ee3-4584-b6f2-c7e4b99958aa" providerId="ADAL" clId="{75AA7C8B-0E1E-45F8-BB8D-1CDD06E81B9F}" dt="2026-02-28T09:27:29.720" v="1871" actId="26606"/>
-          <ac:spMkLst>
-            <pc:docMk/>
-            <pc:sldMk cId="2728812356" sldId="262"/>
-            <ac:spMk id="37" creationId="{AAD0DBB9-1A4B-4391-81D4-CB19F9AB918A}"/>
-          </ac:spMkLst>
-        </pc:spChg>
-        <pc:spChg chg="add del">
-          <ac:chgData name="Sofia Negueruela Avellaneda" userId="1355ce59-2ee3-4584-b6f2-c7e4b99958aa" providerId="ADAL" clId="{75AA7C8B-0E1E-45F8-BB8D-1CDD06E81B9F}" dt="2026-02-28T09:27:29.720" v="1871" actId="26606"/>
-          <ac:spMkLst>
-            <pc:docMk/>
-            <pc:sldMk cId="2728812356" sldId="262"/>
-            <ac:spMk id="38" creationId="{063BBA22-50EA-4C4D-BE05-F1CE4E63AA56}"/>
           </ac:spMkLst>
         </pc:spChg>
         <pc:spChg chg="add">
@@ -1531,14 +547,6 @@
             <ac:spMk id="49" creationId="{063BBA22-50EA-4C4D-BE05-F1CE4E63AA56}"/>
           </ac:spMkLst>
         </pc:spChg>
-        <pc:graphicFrameChg chg="add del">
-          <ac:chgData name="Sofia Negueruela Avellaneda" userId="1355ce59-2ee3-4584-b6f2-c7e4b99958aa" providerId="ADAL" clId="{75AA7C8B-0E1E-45F8-BB8D-1CDD06E81B9F}" dt="2026-02-28T09:26:31.698" v="1854" actId="26606"/>
-          <ac:graphicFrameMkLst>
-            <pc:docMk/>
-            <pc:sldMk cId="2728812356" sldId="262"/>
-            <ac:graphicFrameMk id="5" creationId="{7A64CBAA-9BC0-2919-8F7D-D26E2A108DE9}"/>
-          </ac:graphicFrameMkLst>
-        </pc:graphicFrameChg>
         <pc:graphicFrameChg chg="add mod modGraphic">
           <ac:chgData name="Sofia Negueruela Avellaneda" userId="1355ce59-2ee3-4584-b6f2-c7e4b99958aa" providerId="ADAL" clId="{75AA7C8B-0E1E-45F8-BB8D-1CDD06E81B9F}" dt="2026-02-28T09:28:30.680" v="1878" actId="14100"/>
           <ac:graphicFrameMkLst>
@@ -1547,195 +555,6 @@
             <ac:graphicFrameMk id="7" creationId="{F11D2317-1CAC-1D7C-B882-9909ECBA207B}"/>
           </ac:graphicFrameMkLst>
         </pc:graphicFrameChg>
-        <pc:graphicFrameChg chg="add del mod modGraphic">
-          <ac:chgData name="Sofia Negueruela Avellaneda" userId="1355ce59-2ee3-4584-b6f2-c7e4b99958aa" providerId="ADAL" clId="{75AA7C8B-0E1E-45F8-BB8D-1CDD06E81B9F}" dt="2026-02-28T09:26:54.953" v="1863" actId="478"/>
-          <ac:graphicFrameMkLst>
-            <pc:docMk/>
-            <pc:sldMk cId="2728812356" sldId="262"/>
-            <ac:graphicFrameMk id="17" creationId="{45398357-B55D-7DF3-5728-CDE3E359EDAF}"/>
-          </ac:graphicFrameMkLst>
-        </pc:graphicFrameChg>
-      </pc:sldChg>
-      <pc:sldChg chg="modSp new del mod">
-        <pc:chgData name="Sofia Negueruela Avellaneda" userId="1355ce59-2ee3-4584-b6f2-c7e4b99958aa" providerId="ADAL" clId="{75AA7C8B-0E1E-45F8-BB8D-1CDD06E81B9F}" dt="2026-02-28T09:28:34.215" v="1879" actId="47"/>
-        <pc:sldMkLst>
-          <pc:docMk/>
-          <pc:sldMk cId="3071391545" sldId="263"/>
-        </pc:sldMkLst>
-        <pc:spChg chg="mod">
-          <ac:chgData name="Sofia Negueruela Avellaneda" userId="1355ce59-2ee3-4584-b6f2-c7e4b99958aa" providerId="ADAL" clId="{75AA7C8B-0E1E-45F8-BB8D-1CDD06E81B9F}" dt="2026-02-27T11:42:18.970" v="289" actId="20577"/>
-          <ac:spMkLst>
-            <pc:docMk/>
-            <pc:sldMk cId="3071391545" sldId="263"/>
-            <ac:spMk id="2" creationId="{155CDEC7-1F0F-FCBC-23F9-F5A38A9D941B}"/>
-          </ac:spMkLst>
-        </pc:spChg>
-      </pc:sldChg>
-      <pc:sldChg chg="addSp delSp modSp new del mod setBg">
-        <pc:chgData name="Sofia Negueruela Avellaneda" userId="1355ce59-2ee3-4584-b6f2-c7e4b99958aa" providerId="ADAL" clId="{75AA7C8B-0E1E-45F8-BB8D-1CDD06E81B9F}" dt="2026-02-28T09:31:57.073" v="1885" actId="47"/>
-        <pc:sldMkLst>
-          <pc:docMk/>
-          <pc:sldMk cId="413946396" sldId="264"/>
-        </pc:sldMkLst>
-        <pc:spChg chg="mod">
-          <ac:chgData name="Sofia Negueruela Avellaneda" userId="1355ce59-2ee3-4584-b6f2-c7e4b99958aa" providerId="ADAL" clId="{75AA7C8B-0E1E-45F8-BB8D-1CDD06E81B9F}" dt="2026-02-28T09:16:35.428" v="1827" actId="26606"/>
-          <ac:spMkLst>
-            <pc:docMk/>
-            <pc:sldMk cId="413946396" sldId="264"/>
-            <ac:spMk id="2" creationId="{5C0AEA0F-0F8E-B39D-B4BC-6BEDD548668A}"/>
-          </ac:spMkLst>
-        </pc:spChg>
-        <pc:spChg chg="del">
-          <ac:chgData name="Sofia Negueruela Avellaneda" userId="1355ce59-2ee3-4584-b6f2-c7e4b99958aa" providerId="ADAL" clId="{75AA7C8B-0E1E-45F8-BB8D-1CDD06E81B9F}" dt="2026-02-28T09:16:02.215" v="1821" actId="478"/>
-          <ac:spMkLst>
-            <pc:docMk/>
-            <pc:sldMk cId="413946396" sldId="264"/>
-            <ac:spMk id="3" creationId="{CDC1EF8C-07F8-5F01-C7EA-5E49348F56DA}"/>
-          </ac:spMkLst>
-        </pc:spChg>
-        <pc:spChg chg="add del">
-          <ac:chgData name="Sofia Negueruela Avellaneda" userId="1355ce59-2ee3-4584-b6f2-c7e4b99958aa" providerId="ADAL" clId="{75AA7C8B-0E1E-45F8-BB8D-1CDD06E81B9F}" dt="2026-02-28T09:16:18.597" v="1823" actId="26606"/>
-          <ac:spMkLst>
-            <pc:docMk/>
-            <pc:sldMk cId="413946396" sldId="264"/>
-            <ac:spMk id="7" creationId="{6F5A5072-7B47-4D32-B52A-4EBBF590B8A5}"/>
-          </ac:spMkLst>
-        </pc:spChg>
-        <pc:spChg chg="add del">
-          <ac:chgData name="Sofia Negueruela Avellaneda" userId="1355ce59-2ee3-4584-b6f2-c7e4b99958aa" providerId="ADAL" clId="{75AA7C8B-0E1E-45F8-BB8D-1CDD06E81B9F}" dt="2026-02-28T09:16:18.597" v="1823" actId="26606"/>
-          <ac:spMkLst>
-            <pc:docMk/>
-            <pc:sldMk cId="413946396" sldId="264"/>
-            <ac:spMk id="9" creationId="{9715DAF0-AE1B-46C9-8A6B-DB2AA05AB91D}"/>
-          </ac:spMkLst>
-        </pc:spChg>
-        <pc:spChg chg="add del">
-          <ac:chgData name="Sofia Negueruela Avellaneda" userId="1355ce59-2ee3-4584-b6f2-c7e4b99958aa" providerId="ADAL" clId="{75AA7C8B-0E1E-45F8-BB8D-1CDD06E81B9F}" dt="2026-02-28T09:16:18.597" v="1823" actId="26606"/>
-          <ac:spMkLst>
-            <pc:docMk/>
-            <pc:sldMk cId="413946396" sldId="264"/>
-            <ac:spMk id="11" creationId="{6016219D-510E-4184-9090-6D5578A87BD1}"/>
-          </ac:spMkLst>
-        </pc:spChg>
-        <pc:spChg chg="add del">
-          <ac:chgData name="Sofia Negueruela Avellaneda" userId="1355ce59-2ee3-4584-b6f2-c7e4b99958aa" providerId="ADAL" clId="{75AA7C8B-0E1E-45F8-BB8D-1CDD06E81B9F}" dt="2026-02-28T09:16:18.597" v="1823" actId="26606"/>
-          <ac:spMkLst>
-            <pc:docMk/>
-            <pc:sldMk cId="413946396" sldId="264"/>
-            <ac:spMk id="13" creationId="{AFF4A713-7B75-4B21-90D7-5AB19547C728}"/>
-          </ac:spMkLst>
-        </pc:spChg>
-        <pc:spChg chg="add del">
-          <ac:chgData name="Sofia Negueruela Avellaneda" userId="1355ce59-2ee3-4584-b6f2-c7e4b99958aa" providerId="ADAL" clId="{75AA7C8B-0E1E-45F8-BB8D-1CDD06E81B9F}" dt="2026-02-28T09:16:18.597" v="1823" actId="26606"/>
-          <ac:spMkLst>
-            <pc:docMk/>
-            <pc:sldMk cId="413946396" sldId="264"/>
-            <ac:spMk id="15" creationId="{DC631C0B-6DA6-4E57-8231-CE32B3434A7E}"/>
-          </ac:spMkLst>
-        </pc:spChg>
-        <pc:spChg chg="add del">
-          <ac:chgData name="Sofia Negueruela Avellaneda" userId="1355ce59-2ee3-4584-b6f2-c7e4b99958aa" providerId="ADAL" clId="{75AA7C8B-0E1E-45F8-BB8D-1CDD06E81B9F}" dt="2026-02-28T09:16:18.597" v="1823" actId="26606"/>
-          <ac:spMkLst>
-            <pc:docMk/>
-            <pc:sldMk cId="413946396" sldId="264"/>
-            <ac:spMk id="17" creationId="{C29501E6-A978-4A61-9689-9085AF97A53A}"/>
-          </ac:spMkLst>
-        </pc:spChg>
-        <pc:spChg chg="add del">
-          <ac:chgData name="Sofia Negueruela Avellaneda" userId="1355ce59-2ee3-4584-b6f2-c7e4b99958aa" providerId="ADAL" clId="{75AA7C8B-0E1E-45F8-BB8D-1CDD06E81B9F}" dt="2026-02-28T09:16:35.428" v="1827" actId="26606"/>
-          <ac:spMkLst>
-            <pc:docMk/>
-            <pc:sldMk cId="413946396" sldId="264"/>
-            <ac:spMk id="19" creationId="{B810725C-984E-4EC2-A5FA-A193878CB858}"/>
-          </ac:spMkLst>
-        </pc:spChg>
-        <pc:spChg chg="add del">
-          <ac:chgData name="Sofia Negueruela Avellaneda" userId="1355ce59-2ee3-4584-b6f2-c7e4b99958aa" providerId="ADAL" clId="{75AA7C8B-0E1E-45F8-BB8D-1CDD06E81B9F}" dt="2026-02-28T09:16:35.428" v="1827" actId="26606"/>
-          <ac:spMkLst>
-            <pc:docMk/>
-            <pc:sldMk cId="413946396" sldId="264"/>
-            <ac:spMk id="20" creationId="{8C790BE2-4E4F-4AAF-81A2-4A6F4885EBE6}"/>
-          </ac:spMkLst>
-        </pc:spChg>
-        <pc:spChg chg="add del">
-          <ac:chgData name="Sofia Negueruela Avellaneda" userId="1355ce59-2ee3-4584-b6f2-c7e4b99958aa" providerId="ADAL" clId="{75AA7C8B-0E1E-45F8-BB8D-1CDD06E81B9F}" dt="2026-02-28T09:16:35.428" v="1827" actId="26606"/>
-          <ac:spMkLst>
-            <pc:docMk/>
-            <pc:sldMk cId="413946396" sldId="264"/>
-            <ac:spMk id="21" creationId="{D28B54C3-B57B-472A-B96E-1FCB67093DC2}"/>
-          </ac:spMkLst>
-        </pc:spChg>
-        <pc:spChg chg="add del">
-          <ac:chgData name="Sofia Negueruela Avellaneda" userId="1355ce59-2ee3-4584-b6f2-c7e4b99958aa" providerId="ADAL" clId="{75AA7C8B-0E1E-45F8-BB8D-1CDD06E81B9F}" dt="2026-02-28T09:16:35.428" v="1827" actId="26606"/>
-          <ac:spMkLst>
-            <pc:docMk/>
-            <pc:sldMk cId="413946396" sldId="264"/>
-            <ac:spMk id="22" creationId="{ED3707AD-8261-4357-9C64-EEC41E832582}"/>
-          </ac:spMkLst>
-        </pc:spChg>
-        <pc:spChg chg="add">
-          <ac:chgData name="Sofia Negueruela Avellaneda" userId="1355ce59-2ee3-4584-b6f2-c7e4b99958aa" providerId="ADAL" clId="{75AA7C8B-0E1E-45F8-BB8D-1CDD06E81B9F}" dt="2026-02-28T09:16:18.597" v="1824" actId="26606"/>
-          <ac:spMkLst>
-            <pc:docMk/>
-            <pc:sldMk cId="413946396" sldId="264"/>
-            <ac:spMk id="23" creationId="{7DB3C429-F8DA-49B9-AF84-21996FCF78B5}"/>
-          </ac:spMkLst>
-        </pc:spChg>
-        <pc:spChg chg="add del">
-          <ac:chgData name="Sofia Negueruela Avellaneda" userId="1355ce59-2ee3-4584-b6f2-c7e4b99958aa" providerId="ADAL" clId="{75AA7C8B-0E1E-45F8-BB8D-1CDD06E81B9F}" dt="2026-02-28T09:16:35.428" v="1827" actId="26606"/>
-          <ac:spMkLst>
-            <pc:docMk/>
-            <pc:sldMk cId="413946396" sldId="264"/>
-            <ac:spMk id="24" creationId="{C4C9F2B0-1044-46EB-8AEB-C3BFFDE6C2CC}"/>
-          </ac:spMkLst>
-        </pc:spChg>
-        <pc:spChg chg="add del">
-          <ac:chgData name="Sofia Negueruela Avellaneda" userId="1355ce59-2ee3-4584-b6f2-c7e4b99958aa" providerId="ADAL" clId="{75AA7C8B-0E1E-45F8-BB8D-1CDD06E81B9F}" dt="2026-02-28T09:16:35.428" v="1827" actId="26606"/>
-          <ac:spMkLst>
-            <pc:docMk/>
-            <pc:sldMk cId="413946396" sldId="264"/>
-            <ac:spMk id="25" creationId="{D1B01BE8-EBAB-4286-84CC-EC07C7F957AC}"/>
-          </ac:spMkLst>
-        </pc:spChg>
-        <pc:spChg chg="add">
-          <ac:chgData name="Sofia Negueruela Avellaneda" userId="1355ce59-2ee3-4584-b6f2-c7e4b99958aa" providerId="ADAL" clId="{75AA7C8B-0E1E-45F8-BB8D-1CDD06E81B9F}" dt="2026-02-28T09:16:35.428" v="1827" actId="26606"/>
-          <ac:spMkLst>
-            <pc:docMk/>
-            <pc:sldMk cId="413946396" sldId="264"/>
-            <ac:spMk id="30" creationId="{43C48B49-6135-48B6-AC0F-97E5D8D1F03F}"/>
-          </ac:spMkLst>
-        </pc:spChg>
-        <pc:spChg chg="add">
-          <ac:chgData name="Sofia Negueruela Avellaneda" userId="1355ce59-2ee3-4584-b6f2-c7e4b99958aa" providerId="ADAL" clId="{75AA7C8B-0E1E-45F8-BB8D-1CDD06E81B9F}" dt="2026-02-28T09:16:35.428" v="1827" actId="26606"/>
-          <ac:spMkLst>
-            <pc:docMk/>
-            <pc:sldMk cId="413946396" sldId="264"/>
-            <ac:spMk id="36" creationId="{F256AC18-FB41-4977-8B0C-F5082335AB7D}"/>
-          </ac:spMkLst>
-        </pc:spChg>
-        <pc:spChg chg="add">
-          <ac:chgData name="Sofia Negueruela Avellaneda" userId="1355ce59-2ee3-4584-b6f2-c7e4b99958aa" providerId="ADAL" clId="{75AA7C8B-0E1E-45F8-BB8D-1CDD06E81B9F}" dt="2026-02-28T09:16:35.428" v="1827" actId="26606"/>
-          <ac:spMkLst>
-            <pc:docMk/>
-            <pc:sldMk cId="413946396" sldId="264"/>
-            <ac:spMk id="38" creationId="{AFF4A713-7B75-4B21-90D7-5AB19547C728}"/>
-          </ac:spMkLst>
-        </pc:spChg>
-      </pc:sldChg>
-      <pc:sldChg chg="modSp new del mod">
-        <pc:chgData name="Sofia Negueruela Avellaneda" userId="1355ce59-2ee3-4584-b6f2-c7e4b99958aa" providerId="ADAL" clId="{75AA7C8B-0E1E-45F8-BB8D-1CDD06E81B9F}" dt="2026-02-28T09:28:34.648" v="1880" actId="47"/>
-        <pc:sldMkLst>
-          <pc:docMk/>
-          <pc:sldMk cId="1502824025" sldId="265"/>
-        </pc:sldMkLst>
-        <pc:spChg chg="mod">
-          <ac:chgData name="Sofia Negueruela Avellaneda" userId="1355ce59-2ee3-4584-b6f2-c7e4b99958aa" providerId="ADAL" clId="{75AA7C8B-0E1E-45F8-BB8D-1CDD06E81B9F}" dt="2026-02-27T11:42:26.929" v="311" actId="20577"/>
-          <ac:spMkLst>
-            <pc:docMk/>
-            <pc:sldMk cId="1502824025" sldId="265"/>
-            <ac:spMk id="2" creationId="{D7CF8272-41C1-0557-8421-5C50392C6D01}"/>
-          </ac:spMkLst>
-        </pc:spChg>
       </pc:sldChg>
       <pc:sldChg chg="addSp delSp modSp new mod setBg modClrScheme chgLayout">
         <pc:chgData name="Sofia Negueruela Avellaneda" userId="1355ce59-2ee3-4584-b6f2-c7e4b99958aa" providerId="ADAL" clId="{75AA7C8B-0E1E-45F8-BB8D-1CDD06E81B9F}" dt="2026-02-28T09:31:32.483" v="1884" actId="26606"/>
@@ -1743,30 +562,6 @@
           <pc:docMk/>
           <pc:sldMk cId="1040330078" sldId="266"/>
         </pc:sldMkLst>
-        <pc:spChg chg="del mod">
-          <ac:chgData name="Sofia Negueruela Avellaneda" userId="1355ce59-2ee3-4584-b6f2-c7e4b99958aa" providerId="ADAL" clId="{75AA7C8B-0E1E-45F8-BB8D-1CDD06E81B9F}" dt="2026-02-28T09:29:13.334" v="1881" actId="478"/>
-          <ac:spMkLst>
-            <pc:docMk/>
-            <pc:sldMk cId="1040330078" sldId="266"/>
-            <ac:spMk id="2" creationId="{60B8DA91-E93B-F515-4FCD-7BD5342680A5}"/>
-          </ac:spMkLst>
-        </pc:spChg>
-        <pc:spChg chg="del">
-          <ac:chgData name="Sofia Negueruela Avellaneda" userId="1355ce59-2ee3-4584-b6f2-c7e4b99958aa" providerId="ADAL" clId="{75AA7C8B-0E1E-45F8-BB8D-1CDD06E81B9F}" dt="2026-02-28T09:29:16.963" v="1882" actId="700"/>
-          <ac:spMkLst>
-            <pc:docMk/>
-            <pc:sldMk cId="1040330078" sldId="266"/>
-            <ac:spMk id="3" creationId="{FB3B8DC8-7A4C-45FF-673F-851DB208F7EB}"/>
-          </ac:spMkLst>
-        </pc:spChg>
-        <pc:spChg chg="add del mod">
-          <ac:chgData name="Sofia Negueruela Avellaneda" userId="1355ce59-2ee3-4584-b6f2-c7e4b99958aa" providerId="ADAL" clId="{75AA7C8B-0E1E-45F8-BB8D-1CDD06E81B9F}" dt="2026-02-28T09:29:16.963" v="1882" actId="700"/>
-          <ac:spMkLst>
-            <pc:docMk/>
-            <pc:sldMk cId="1040330078" sldId="266"/>
-            <ac:spMk id="5" creationId="{33D15374-8A5E-C35B-5F7D-36C192F80962}"/>
-          </ac:spMkLst>
-        </pc:spChg>
         <pc:spChg chg="add">
           <ac:chgData name="Sofia Negueruela Avellaneda" userId="1355ce59-2ee3-4584-b6f2-c7e4b99958aa" providerId="ADAL" clId="{75AA7C8B-0E1E-45F8-BB8D-1CDD06E81B9F}" dt="2026-02-28T09:31:32.483" v="1884" actId="26606"/>
           <ac:spMkLst>
@@ -5924,7 +4719,7 @@
   <dgm:whole/>
   <dgm:extLst>
     <a:ext uri="http://schemas.microsoft.com/office/drawing/2008/diagram">
-      <dsp:dataModelExt xmlns:dsp="http://schemas.microsoft.com/office/drawing/2008/diagram" relId="rId8" minVer="http://schemas.openxmlformats.org/drawingml/2006/diagram"/>
+      <dsp:dataModelExt xmlns:dsp="http://schemas.microsoft.com/office/drawing/2008/diagram" relId="rId7" minVer="http://schemas.openxmlformats.org/drawingml/2006/diagram"/>
     </a:ext>
   </dgm:extLst>
 </dgm:dataModel>
@@ -6580,7 +5375,7 @@
         <a:p>
           <a:r>
             <a:rPr lang="es-ES" dirty="0"/>
-            <a:t>Grafos de conocimiento</a:t>
+            <a:t>Investigación sobre grafos de conocimiento</a:t>
           </a:r>
         </a:p>
       </dgm:t>
@@ -6616,7 +5411,7 @@
         <a:p>
           <a:r>
             <a:rPr lang="es-ES" dirty="0"/>
-            <a:t>Generación </a:t>
+            <a:t>Investigación de la generación </a:t>
           </a:r>
           <a:r>
             <a:rPr lang="es-ES" dirty="0" err="1"/>
@@ -8339,12 +7134,12 @@
         </a:fontRef>
       </dsp:style>
       <dsp:txBody>
-        <a:bodyPr spcFirstLastPara="0" vert="horz" wrap="square" lIns="121920" tIns="121920" rIns="121920" bIns="121920" numCol="1" spcCol="1270" anchor="ctr" anchorCtr="0">
+        <a:bodyPr spcFirstLastPara="0" vert="horz" wrap="square" lIns="106680" tIns="106680" rIns="106680" bIns="106680" numCol="1" spcCol="1270" anchor="ctr" anchorCtr="0">
           <a:noAutofit/>
         </a:bodyPr>
         <a:lstStyle/>
         <a:p>
-          <a:pPr marL="0" lvl="0" indent="0" algn="l" defTabSz="1422400">
+          <a:pPr marL="0" lvl="0" indent="0" algn="l" defTabSz="1244600">
             <a:lnSpc>
               <a:spcPct val="90000"/>
             </a:lnSpc>
@@ -8357,10 +7152,10 @@
             <a:buNone/>
           </a:pPr>
           <a:r>
-            <a:rPr lang="es-ES" sz="3200" kern="1200"/>
+            <a:rPr lang="es-ES" sz="2800" kern="1200"/>
             <a:t>Recopilación de datos</a:t>
           </a:r>
-          <a:endParaRPr lang="es-ES" sz="3200" kern="1200" dirty="0"/>
+          <a:endParaRPr lang="es-ES" sz="2800" kern="1200" dirty="0"/>
         </a:p>
       </dsp:txBody>
       <dsp:txXfrm>
@@ -8421,12 +7216,12 @@
         </a:fontRef>
       </dsp:style>
       <dsp:txBody>
-        <a:bodyPr spcFirstLastPara="0" vert="horz" wrap="square" lIns="121920" tIns="121920" rIns="121920" bIns="121920" numCol="1" spcCol="1270" anchor="ctr" anchorCtr="0">
+        <a:bodyPr spcFirstLastPara="0" vert="horz" wrap="square" lIns="106680" tIns="106680" rIns="106680" bIns="106680" numCol="1" spcCol="1270" anchor="ctr" anchorCtr="0">
           <a:noAutofit/>
         </a:bodyPr>
         <a:lstStyle/>
         <a:p>
-          <a:pPr marL="0" lvl="0" indent="0" algn="l" defTabSz="1422400">
+          <a:pPr marL="0" lvl="0" indent="0" algn="l" defTabSz="1244600">
             <a:lnSpc>
               <a:spcPct val="90000"/>
             </a:lnSpc>
@@ -8439,10 +7234,10 @@
             <a:buNone/>
           </a:pPr>
           <a:r>
-            <a:rPr lang="es-ES" sz="3200" kern="1200"/>
+            <a:rPr lang="es-ES" sz="2800" kern="1200"/>
             <a:t>Procesamiento e ingesta documental</a:t>
           </a:r>
-          <a:endParaRPr lang="es-ES" sz="3200" kern="1200" dirty="0"/>
+          <a:endParaRPr lang="es-ES" sz="2800" kern="1200" dirty="0"/>
         </a:p>
       </dsp:txBody>
       <dsp:txXfrm>
@@ -8503,12 +7298,12 @@
         </a:fontRef>
       </dsp:style>
       <dsp:txBody>
-        <a:bodyPr spcFirstLastPara="0" vert="horz" wrap="square" lIns="121920" tIns="121920" rIns="121920" bIns="121920" numCol="1" spcCol="1270" anchor="ctr" anchorCtr="0">
+        <a:bodyPr spcFirstLastPara="0" vert="horz" wrap="square" lIns="106680" tIns="106680" rIns="106680" bIns="106680" numCol="1" spcCol="1270" anchor="ctr" anchorCtr="0">
           <a:noAutofit/>
         </a:bodyPr>
         <a:lstStyle/>
         <a:p>
-          <a:pPr marL="0" lvl="0" indent="0" algn="l" defTabSz="1422400">
+          <a:pPr marL="0" lvl="0" indent="0" algn="l" defTabSz="1244600">
             <a:lnSpc>
               <a:spcPct val="90000"/>
             </a:lnSpc>
@@ -8521,8 +7316,8 @@
             <a:buNone/>
           </a:pPr>
           <a:r>
-            <a:rPr lang="es-ES" sz="3200" kern="1200" dirty="0"/>
-            <a:t>Grafos de conocimiento</a:t>
+            <a:rPr lang="es-ES" sz="2800" kern="1200" dirty="0"/>
+            <a:t>Investigación sobre grafos de conocimiento</a:t>
           </a:r>
         </a:p>
       </dsp:txBody>
@@ -8584,12 +7379,12 @@
         </a:fontRef>
       </dsp:style>
       <dsp:txBody>
-        <a:bodyPr spcFirstLastPara="0" vert="horz" wrap="square" lIns="121920" tIns="121920" rIns="121920" bIns="121920" numCol="1" spcCol="1270" anchor="ctr" anchorCtr="0">
+        <a:bodyPr spcFirstLastPara="0" vert="horz" wrap="square" lIns="106680" tIns="106680" rIns="106680" bIns="106680" numCol="1" spcCol="1270" anchor="ctr" anchorCtr="0">
           <a:noAutofit/>
         </a:bodyPr>
         <a:lstStyle/>
         <a:p>
-          <a:pPr marL="0" lvl="0" indent="0" algn="l" defTabSz="1422400">
+          <a:pPr marL="0" lvl="0" indent="0" algn="l" defTabSz="1244600">
             <a:lnSpc>
               <a:spcPct val="90000"/>
             </a:lnSpc>
@@ -8602,14 +7397,14 @@
             <a:buNone/>
           </a:pPr>
           <a:r>
-            <a:rPr lang="es-ES" sz="3200" kern="1200" dirty="0"/>
-            <a:t>Generación </a:t>
+            <a:rPr lang="es-ES" sz="2800" kern="1200" dirty="0"/>
+            <a:t>Investigación de la generación </a:t>
           </a:r>
           <a:r>
-            <a:rPr lang="es-ES" sz="3200" kern="1200" dirty="0" err="1"/>
+            <a:rPr lang="es-ES" sz="2800" kern="1200" dirty="0" err="1"/>
             <a:t>multiidioma</a:t>
           </a:r>
-          <a:endParaRPr lang="es-ES" sz="3200" kern="1200" dirty="0"/>
+          <a:endParaRPr lang="es-ES" sz="2800" kern="1200" dirty="0"/>
         </a:p>
       </dsp:txBody>
       <dsp:txXfrm>
@@ -8664,12 +7459,12 @@
         </a:fontRef>
       </dsp:style>
       <dsp:txBody>
-        <a:bodyPr spcFirstLastPara="0" vert="horz" wrap="square" lIns="121920" tIns="121920" rIns="121920" bIns="121920" numCol="1" spcCol="1270" anchor="ctr" anchorCtr="0">
+        <a:bodyPr spcFirstLastPara="0" vert="horz" wrap="square" lIns="106680" tIns="106680" rIns="106680" bIns="106680" numCol="1" spcCol="1270" anchor="ctr" anchorCtr="0">
           <a:noAutofit/>
         </a:bodyPr>
         <a:lstStyle/>
         <a:p>
-          <a:pPr marL="0" lvl="0" indent="0" algn="l" defTabSz="1422400">
+          <a:pPr marL="0" lvl="0" indent="0" algn="l" defTabSz="1244600">
             <a:lnSpc>
               <a:spcPct val="90000"/>
             </a:lnSpc>
@@ -8682,7 +7477,7 @@
             <a:buNone/>
           </a:pPr>
           <a:r>
-            <a:rPr lang="es-ES" sz="3200" kern="1200"/>
+            <a:rPr lang="es-ES" sz="2800" kern="1200"/>
             <a:t>Evaluación y benchmarking</a:t>
           </a:r>
         </a:p>
@@ -17125,7 +15920,7 @@
           <a:p>
             <a:fld id="{11DDA3B7-DF4B-4512-9353-21E7A8669511}" type="datetimeFigureOut">
               <a:rPr lang="es-ES" smtClean="0"/>
-              <a:t>28/02/2026</a:t>
+              <a:t>02/03/2026</a:t>
             </a:fld>
             <a:endParaRPr lang="es-ES"/>
           </a:p>
@@ -17530,8 +16325,37 @@
             </a:r>
             <a:r>
               <a:rPr lang="es-ES" dirty="0"/>
-              <a:t>) con fuentes de conocimiento específicas. Es decir, cuando </a:t>
+              <a:t>) con fuentes de conocimiento específicas. </a:t>
             </a:r>
+          </a:p>
+          <a:p>
+            <a:endParaRPr lang="es-ES" dirty="0"/>
+          </a:p>
+          <a:p>
+            <a:endParaRPr lang="es-ES" dirty="0"/>
+          </a:p>
+          <a:p>
+            <a:r>
+              <a:rPr lang="es-ES" dirty="0"/>
+              <a:t>No tiene sentido implementar el sistema full open </a:t>
+            </a:r>
+            <a:r>
+              <a:rPr lang="es-ES" dirty="0" err="1"/>
+              <a:t>source</a:t>
+            </a:r>
+            <a:r>
+              <a:rPr lang="es-ES" dirty="0"/>
+              <a:t> cuando ya existen soluciones muy potentes </a:t>
+            </a:r>
+            <a:r>
+              <a:rPr lang="es-ES" u="none" dirty="0"/>
+              <a:t>y así el proyecto es en un entorno similar a producción y a lo que se puede encontrar en la vida real. También tiene más </a:t>
+            </a:r>
+            <a:r>
+              <a:rPr lang="es-ES" u="none"/>
+              <a:t>valor empresarial</a:t>
+            </a:r>
+            <a:endParaRPr lang="es-ES" dirty="0"/>
           </a:p>
         </p:txBody>
       </p:sp>
@@ -17651,6 +16475,13 @@
               <a:rPr lang="es-ES" dirty="0"/>
               <a:t> suele derivar en respuestas inconexas)</a:t>
             </a:r>
+          </a:p>
+          <a:p>
+            <a:pPr marL="0" indent="0">
+              <a:buFontTx/>
+              <a:buNone/>
+            </a:pPr>
+            <a:endParaRPr lang="es-ES" dirty="0"/>
           </a:p>
         </p:txBody>
       </p:sp>
@@ -18043,7 +16874,7 @@
           <a:p>
             <a:fld id="{FA838AF1-FF45-4AF1-AEA9-0AA3EBC94766}" type="datetimeFigureOut">
               <a:rPr lang="es-ES" smtClean="0"/>
-              <a:t>28/02/2026</a:t>
+              <a:t>02/03/2026</a:t>
             </a:fld>
             <a:endParaRPr lang="es-ES"/>
           </a:p>
@@ -18241,7 +17072,7 @@
           <a:p>
             <a:fld id="{FA838AF1-FF45-4AF1-AEA9-0AA3EBC94766}" type="datetimeFigureOut">
               <a:rPr lang="es-ES" smtClean="0"/>
-              <a:t>28/02/2026</a:t>
+              <a:t>02/03/2026</a:t>
             </a:fld>
             <a:endParaRPr lang="es-ES"/>
           </a:p>
@@ -18449,7 +17280,7 @@
           <a:p>
             <a:fld id="{FA838AF1-FF45-4AF1-AEA9-0AA3EBC94766}" type="datetimeFigureOut">
               <a:rPr lang="es-ES" smtClean="0"/>
-              <a:t>28/02/2026</a:t>
+              <a:t>02/03/2026</a:t>
             </a:fld>
             <a:endParaRPr lang="es-ES"/>
           </a:p>
@@ -18647,7 +17478,7 @@
           <a:p>
             <a:fld id="{FA838AF1-FF45-4AF1-AEA9-0AA3EBC94766}" type="datetimeFigureOut">
               <a:rPr lang="es-ES" smtClean="0"/>
-              <a:t>28/02/2026</a:t>
+              <a:t>02/03/2026</a:t>
             </a:fld>
             <a:endParaRPr lang="es-ES"/>
           </a:p>
@@ -18922,7 +17753,7 @@
           <a:p>
             <a:fld id="{FA838AF1-FF45-4AF1-AEA9-0AA3EBC94766}" type="datetimeFigureOut">
               <a:rPr lang="es-ES" smtClean="0"/>
-              <a:t>28/02/2026</a:t>
+              <a:t>02/03/2026</a:t>
             </a:fld>
             <a:endParaRPr lang="es-ES"/>
           </a:p>
@@ -19187,7 +18018,7 @@
           <a:p>
             <a:fld id="{FA838AF1-FF45-4AF1-AEA9-0AA3EBC94766}" type="datetimeFigureOut">
               <a:rPr lang="es-ES" smtClean="0"/>
-              <a:t>28/02/2026</a:t>
+              <a:t>02/03/2026</a:t>
             </a:fld>
             <a:endParaRPr lang="es-ES"/>
           </a:p>
@@ -19599,7 +18430,7 @@
           <a:p>
             <a:fld id="{FA838AF1-FF45-4AF1-AEA9-0AA3EBC94766}" type="datetimeFigureOut">
               <a:rPr lang="es-ES" smtClean="0"/>
-              <a:t>28/02/2026</a:t>
+              <a:t>02/03/2026</a:t>
             </a:fld>
             <a:endParaRPr lang="es-ES"/>
           </a:p>
@@ -19740,7 +18571,7 @@
           <a:p>
             <a:fld id="{FA838AF1-FF45-4AF1-AEA9-0AA3EBC94766}" type="datetimeFigureOut">
               <a:rPr lang="es-ES" smtClean="0"/>
-              <a:t>28/02/2026</a:t>
+              <a:t>02/03/2026</a:t>
             </a:fld>
             <a:endParaRPr lang="es-ES"/>
           </a:p>
@@ -19853,7 +18684,7 @@
           <a:p>
             <a:fld id="{FA838AF1-FF45-4AF1-AEA9-0AA3EBC94766}" type="datetimeFigureOut">
               <a:rPr lang="es-ES" smtClean="0"/>
-              <a:t>28/02/2026</a:t>
+              <a:t>02/03/2026</a:t>
             </a:fld>
             <a:endParaRPr lang="es-ES"/>
           </a:p>
@@ -20164,7 +18995,7 @@
           <a:p>
             <a:fld id="{FA838AF1-FF45-4AF1-AEA9-0AA3EBC94766}" type="datetimeFigureOut">
               <a:rPr lang="es-ES" smtClean="0"/>
-              <a:t>28/02/2026</a:t>
+              <a:t>02/03/2026</a:t>
             </a:fld>
             <a:endParaRPr lang="es-ES"/>
           </a:p>
@@ -20452,7 +19283,7 @@
           <a:p>
             <a:fld id="{FA838AF1-FF45-4AF1-AEA9-0AA3EBC94766}" type="datetimeFigureOut">
               <a:rPr lang="es-ES" smtClean="0"/>
-              <a:t>28/02/2026</a:t>
+              <a:t>02/03/2026</a:t>
             </a:fld>
             <a:endParaRPr lang="es-ES"/>
           </a:p>
@@ -20693,7 +19524,7 @@
           <a:p>
             <a:fld id="{FA838AF1-FF45-4AF1-AEA9-0AA3EBC94766}" type="datetimeFigureOut">
               <a:rPr lang="es-ES" smtClean="0"/>
-              <a:t>28/02/2026</a:t>
+              <a:t>02/03/2026</a:t>
             </a:fld>
             <a:endParaRPr lang="es-ES"/>
           </a:p>
@@ -22657,53 +21488,6 @@
           </a:p>
         </p:txBody>
       </p:sp>
-      <p:pic>
-        <p:nvPicPr>
-          <p:cNvPr id="2050" name="Picture 2" descr="Unlocking the Untapped Potential of Retrieval-Augmented Generation (RAG ...">
-            <a:extLst>
-              <a:ext uri="{FF2B5EF4-FFF2-40B4-BE49-F238E27FC236}">
-                <a16:creationId xmlns:a16="http://schemas.microsoft.com/office/drawing/2014/main" id="{514F60A3-66FB-4739-A6CE-F105CC31FF95}"/>
-              </a:ext>
-            </a:extLst>
-          </p:cNvPr>
-          <p:cNvPicPr>
-            <a:picLocks noChangeAspect="1" noChangeArrowheads="1"/>
-          </p:cNvPicPr>
-          <p:nvPr/>
-        </p:nvPicPr>
-        <p:blipFill rotWithShape="1">
-          <a:blip r:embed="rId3">
-            <a:extLst>
-              <a:ext uri="{28A0092B-C50C-407E-A947-70E740481C1C}">
-                <a14:useLocalDpi xmlns:a14="http://schemas.microsoft.com/office/drawing/2010/main" val="0"/>
-              </a:ext>
-            </a:extLst>
-          </a:blip>
-          <a:srcRect l="-1" r="-1" b="411"/>
-          <a:stretch>
-            <a:fillRect/>
-          </a:stretch>
-        </p:blipFill>
-        <p:spPr bwMode="auto">
-          <a:xfrm>
-            <a:off x="1073624" y="2387256"/>
-            <a:ext cx="10044752" cy="3776279"/>
-          </a:xfrm>
-          <a:prstGeom prst="rect">
-            <a:avLst/>
-          </a:prstGeom>
-          <a:noFill/>
-          <a:extLst>
-            <a:ext uri="{909E8E84-426E-40DD-AFC4-6F175D3DCCD1}">
-              <a14:hiddenFill xmlns:a14="http://schemas.microsoft.com/office/drawing/2010/main">
-                <a:solidFill>
-                  <a:srgbClr val="FFFFFF"/>
-                </a:solidFill>
-              </a14:hiddenFill>
-            </a:ext>
-          </a:extLst>
-        </p:spPr>
-      </p:pic>
       <p:sp>
         <p:nvSpPr>
           <p:cNvPr id="2066" name="Rectangle 2065">
@@ -22877,10 +21661,113 @@
         </p:xfrm>
         <a:graphic>
           <a:graphicData uri="http://schemas.openxmlformats.org/drawingml/2006/diagram">
-            <dgm:relIds xmlns:dgm="http://schemas.openxmlformats.org/drawingml/2006/diagram" xmlns:r="http://schemas.openxmlformats.org/officeDocument/2006/relationships" r:dm="rId4" r:lo="rId5" r:qs="rId6" r:cs="rId7"/>
+            <dgm:relIds xmlns:dgm="http://schemas.openxmlformats.org/drawingml/2006/diagram" xmlns:r="http://schemas.openxmlformats.org/officeDocument/2006/relationships" r:dm="rId3" r:lo="rId4" r:qs="rId5" r:cs="rId6"/>
           </a:graphicData>
         </a:graphic>
       </p:graphicFrame>
+      <p:grpSp>
+        <p:nvGrpSpPr>
+          <p:cNvPr id="4" name="Grupo 3">
+            <a:extLst>
+              <a:ext uri="{FF2B5EF4-FFF2-40B4-BE49-F238E27FC236}">
+                <a16:creationId xmlns:a16="http://schemas.microsoft.com/office/drawing/2014/main" id="{219076BD-3A9F-ED8E-0424-86E085840F64}"/>
+              </a:ext>
+            </a:extLst>
+          </p:cNvPr>
+          <p:cNvGrpSpPr/>
+          <p:nvPr/>
+        </p:nvGrpSpPr>
+        <p:grpSpPr>
+          <a:xfrm>
+            <a:off x="1073624" y="2367234"/>
+            <a:ext cx="10044752" cy="3776279"/>
+            <a:chOff x="1073624" y="2515991"/>
+            <a:chExt cx="10044752" cy="3776279"/>
+          </a:xfrm>
+        </p:grpSpPr>
+        <p:pic>
+          <p:nvPicPr>
+            <p:cNvPr id="2050" name="Picture 2" descr="Unlocking the Untapped Potential of Retrieval-Augmented Generation (RAG ...">
+              <a:extLst>
+                <a:ext uri="{FF2B5EF4-FFF2-40B4-BE49-F238E27FC236}">
+                  <a16:creationId xmlns:a16="http://schemas.microsoft.com/office/drawing/2014/main" id="{514F60A3-66FB-4739-A6CE-F105CC31FF95}"/>
+                </a:ext>
+              </a:extLst>
+            </p:cNvPr>
+            <p:cNvPicPr>
+              <a:picLocks noChangeAspect="1" noChangeArrowheads="1"/>
+            </p:cNvPicPr>
+            <p:nvPr/>
+          </p:nvPicPr>
+          <p:blipFill rotWithShape="1">
+            <a:blip r:embed="rId8">
+              <a:extLst>
+                <a:ext uri="{28A0092B-C50C-407E-A947-70E740481C1C}">
+                  <a14:useLocalDpi xmlns:a14="http://schemas.microsoft.com/office/drawing/2010/main" val="0"/>
+                </a:ext>
+              </a:extLst>
+            </a:blip>
+            <a:srcRect l="-1" r="-1" b="411"/>
+            <a:stretch>
+              <a:fillRect/>
+            </a:stretch>
+          </p:blipFill>
+          <p:spPr bwMode="auto">
+            <a:xfrm>
+              <a:off x="1073624" y="2515991"/>
+              <a:ext cx="10044752" cy="3776279"/>
+            </a:xfrm>
+            <a:prstGeom prst="rect">
+              <a:avLst/>
+            </a:prstGeom>
+            <a:noFill/>
+            <a:extLst>
+              <a:ext uri="{909E8E84-426E-40DD-AFC4-6F175D3DCCD1}">
+                <a14:hiddenFill xmlns:a14="http://schemas.microsoft.com/office/drawing/2010/main">
+                  <a:solidFill>
+                    <a:srgbClr val="FFFFFF"/>
+                  </a:solidFill>
+                </a14:hiddenFill>
+              </a:ext>
+            </a:extLst>
+          </p:spPr>
+        </p:pic>
+        <p:sp>
+          <p:nvSpPr>
+            <p:cNvPr id="3" name="CuadroTexto 2">
+              <a:extLst>
+                <a:ext uri="{FF2B5EF4-FFF2-40B4-BE49-F238E27FC236}">
+                  <a16:creationId xmlns:a16="http://schemas.microsoft.com/office/drawing/2014/main" id="{4F058122-0ED0-A06D-74CC-4FFD9AD1E58F}"/>
+                </a:ext>
+              </a:extLst>
+            </p:cNvPr>
+            <p:cNvSpPr txBox="1"/>
+            <p:nvPr/>
+          </p:nvSpPr>
+          <p:spPr>
+            <a:xfrm>
+              <a:off x="8607972" y="2678543"/>
+              <a:ext cx="1776249" cy="338554"/>
+            </a:xfrm>
+            <a:prstGeom prst="rect">
+              <a:avLst/>
+            </a:prstGeom>
+            <a:noFill/>
+          </p:spPr>
+          <p:txBody>
+            <a:bodyPr wrap="square" rtlCol="0">
+              <a:spAutoFit/>
+            </a:bodyPr>
+            <a:lstStyle/>
+            <a:p>
+              <a:r>
+                <a:rPr lang="es-ES" sz="1600" dirty="0"/>
+                <a:t>Búsqueda híbrida</a:t>
+              </a:r>
+            </a:p>
+          </p:txBody>
+        </p:sp>
+      </p:grpSp>
     </p:spTree>
     <p:extLst>
       <p:ext uri="{BB962C8B-B14F-4D97-AF65-F5344CB8AC3E}">
@@ -23305,7 +22192,7 @@
 </file>
 
 <file path=ppt/slides/slide5.xml><?xml version="1.0" encoding="utf-8"?>
-<p:sld xmlns:a="http://schemas.openxmlformats.org/drawingml/2006/main" xmlns:r="http://schemas.openxmlformats.org/officeDocument/2006/relationships" xmlns:p="http://schemas.openxmlformats.org/presentationml/2006/main">
+<p:sld xmlns:a="http://schemas.openxmlformats.org/drawingml/2006/main" xmlns:r="http://schemas.openxmlformats.org/officeDocument/2006/relationships" xmlns:p="http://schemas.openxmlformats.org/presentationml/2006/main" show="0">
   <p:cSld>
     <p:spTree>
       <p:nvGrpSpPr>
@@ -23712,7 +22599,7 @@
           <p:nvPr>
             <p:extLst>
               <p:ext uri="{D42A27DB-BD31-4B8C-83A1-F6EECF244321}">
-                <p14:modId xmlns:p14="http://schemas.microsoft.com/office/powerpoint/2010/main" val="2693530528"/>
+                <p14:modId xmlns:p14="http://schemas.microsoft.com/office/powerpoint/2010/main" val="3285345983"/>
               </p:ext>
             </p:extLst>
           </p:nvPr>

--- a/doc/20260227_Presentacion_AnexoB.pptx
+++ b/doc/20260227_Presentacion_AnexoB.pptx
@@ -133,11 +133,11 @@
             <p14:sldId id="258"/>
             <p14:sldId id="268"/>
             <p14:sldId id="262"/>
+            <p14:sldId id="269"/>
           </p14:sldIdLst>
         </p14:section>
         <p14:section name="Resultados y estado actual" id="{673AEFD9-50FE-4A82-A53B-85175633FD40}">
           <p14:sldIdLst>
-            <p14:sldId id="269"/>
             <p14:sldId id="270"/>
           </p14:sldIdLst>
         </p14:section>
@@ -150,20 +150,12 @@
 </p:presentation>
 </file>
 
-<file path=ppt/revisionInfo.xml><?xml version="1.0" encoding="utf-8"?>
-<p1510:revInfo xmlns:a="http://schemas.openxmlformats.org/drawingml/2006/main" xmlns:r="http://schemas.openxmlformats.org/officeDocument/2006/relationships" xmlns:p1510="http://schemas.microsoft.com/office/powerpoint/2015/10/main">
-  <p1510:revLst>
-    <p1510:client id="{B8B30D3D-AB1C-4DCE-888A-F70CA2E70373}" v="56" dt="2026-04-17T21:19:07.630"/>
-  </p1510:revLst>
-</p1510:revInfo>
-</file>
-
 <file path=ppt/changesInfos/changesInfo1.xml><?xml version="1.0" encoding="utf-8"?>
 <pc:chgInfo xmlns:a="http://schemas.openxmlformats.org/drawingml/2006/main" xmlns:r="http://schemas.openxmlformats.org/officeDocument/2006/relationships" xmlns:ac="http://schemas.microsoft.com/office/drawing/2013/main/command" xmlns:pc="http://schemas.microsoft.com/office/powerpoint/2013/main/command">
   <pc:docChgLst>
     <pc:chgData name="Sofia Negueruela Avellaneda" userId="1355ce59-2ee3-4584-b6f2-c7e4b99958aa" providerId="ADAL" clId="{75AA7C8B-0E1E-45F8-BB8D-1CDD06E81B9F}"/>
     <pc:docChg chg="undo redo custSel addSld delSld modSld sldOrd addSection modSection">
-      <pc:chgData name="Sofia Negueruela Avellaneda" userId="1355ce59-2ee3-4584-b6f2-c7e4b99958aa" providerId="ADAL" clId="{75AA7C8B-0E1E-45F8-BB8D-1CDD06E81B9F}" dt="2026-04-17T21:19:46.971" v="2590" actId="20577"/>
+      <pc:chgData name="Sofia Negueruela Avellaneda" userId="1355ce59-2ee3-4584-b6f2-c7e4b99958aa" providerId="ADAL" clId="{75AA7C8B-0E1E-45F8-BB8D-1CDD06E81B9F}" dt="2026-04-30T16:06:10.613" v="2749" actId="20577"/>
       <pc:docMkLst>
         <pc:docMk/>
       </pc:docMkLst>
@@ -182,8 +174,8 @@
           </ac:spMkLst>
         </pc:spChg>
       </pc:sldChg>
-      <pc:sldChg chg="addSp delSp modSp ord">
-        <pc:chgData name="Sofia Negueruela Avellaneda" userId="1355ce59-2ee3-4584-b6f2-c7e4b99958aa" providerId="ADAL" clId="{75AA7C8B-0E1E-45F8-BB8D-1CDD06E81B9F}" dt="2026-04-17T21:18:42.076" v="2468"/>
+      <pc:sldChg chg="addSp delSp modSp mod ord modShow">
+        <pc:chgData name="Sofia Negueruela Avellaneda" userId="1355ce59-2ee3-4584-b6f2-c7e4b99958aa" providerId="ADAL" clId="{75AA7C8B-0E1E-45F8-BB8D-1CDD06E81B9F}" dt="2026-04-30T15:33:23.780" v="2593" actId="729"/>
         <pc:sldMkLst>
           <pc:docMk/>
           <pc:sldMk cId="1987742604" sldId="257"/>
@@ -204,22 +196,6 @@
             <ac:grpSpMk id="4" creationId="{219076BD-3A9F-ED8E-0424-86E085840F64}"/>
           </ac:grpSpMkLst>
         </pc:grpChg>
-        <pc:picChg chg="del">
-          <ac:chgData name="Sofia Negueruela Avellaneda" userId="1355ce59-2ee3-4584-b6f2-c7e4b99958aa" providerId="ADAL" clId="{75AA7C8B-0E1E-45F8-BB8D-1CDD06E81B9F}" dt="2026-04-17T21:18:41.526" v="2467" actId="478"/>
-          <ac:picMkLst>
-            <pc:docMk/>
-            <pc:sldMk cId="1987742604" sldId="257"/>
-            <ac:picMk id="1028" creationId="{A8F3D146-3702-98A4-CD6D-C9EB21828969}"/>
-          </ac:picMkLst>
-        </pc:picChg>
-        <pc:picChg chg="del">
-          <ac:chgData name="Sofia Negueruela Avellaneda" userId="1355ce59-2ee3-4584-b6f2-c7e4b99958aa" providerId="ADAL" clId="{75AA7C8B-0E1E-45F8-BB8D-1CDD06E81B9F}" dt="2026-04-17T21:18:41.526" v="2467" actId="478"/>
-          <ac:picMkLst>
-            <pc:docMk/>
-            <pc:sldMk cId="1987742604" sldId="257"/>
-            <ac:picMk id="1034" creationId="{ECAEE3CF-7C86-519E-D00A-16EEFC2B6614}"/>
-          </ac:picMkLst>
-        </pc:picChg>
         <pc:picChg chg="mod">
           <ac:chgData name="Sofia Negueruela Avellaneda" userId="1355ce59-2ee3-4584-b6f2-c7e4b99958aa" providerId="ADAL" clId="{75AA7C8B-0E1E-45F8-BB8D-1CDD06E81B9F}" dt="2026-04-17T21:18:42.076" v="2468"/>
           <ac:picMkLst>
@@ -251,22 +227,6 @@
             <ac:spMk id="7" creationId="{1DDCEBD5-515E-C525-00A4-39F656184B2C}"/>
           </ac:spMkLst>
         </pc:spChg>
-        <pc:grpChg chg="del">
-          <ac:chgData name="Sofia Negueruela Avellaneda" userId="1355ce59-2ee3-4584-b6f2-c7e4b99958aa" providerId="ADAL" clId="{75AA7C8B-0E1E-45F8-BB8D-1CDD06E81B9F}" dt="2026-04-17T21:18:32.831" v="2466" actId="21"/>
-          <ac:grpSpMkLst>
-            <pc:docMk/>
-            <pc:sldMk cId="1030600834" sldId="258"/>
-            <ac:grpSpMk id="4" creationId="{219076BD-3A9F-ED8E-0424-86E085840F64}"/>
-          </ac:grpSpMkLst>
-        </pc:grpChg>
-        <pc:graphicFrameChg chg="add del mod">
-          <ac:chgData name="Sofia Negueruela Avellaneda" userId="1355ce59-2ee3-4584-b6f2-c7e4b99958aa" providerId="ADAL" clId="{75AA7C8B-0E1E-45F8-BB8D-1CDD06E81B9F}" dt="2026-04-17T21:19:28.474" v="2531" actId="478"/>
-          <ac:graphicFrameMkLst>
-            <pc:docMk/>
-            <pc:sldMk cId="1030600834" sldId="258"/>
-            <ac:graphicFrameMk id="5" creationId="{17073054-FD1A-06E0-5256-528055FCDDF9}"/>
-          </ac:graphicFrameMkLst>
-        </pc:graphicFrameChg>
       </pc:sldChg>
       <pc:sldChg chg="ord">
         <pc:chgData name="Sofia Negueruela Avellaneda" userId="1355ce59-2ee3-4584-b6f2-c7e4b99958aa" providerId="ADAL" clId="{75AA7C8B-0E1E-45F8-BB8D-1CDD06E81B9F}" dt="2026-04-17T16:30:19.637" v="2369"/>
@@ -275,32 +235,18 @@
           <pc:sldMk cId="425261687" sldId="259"/>
         </pc:sldMkLst>
       </pc:sldChg>
-      <pc:sldChg chg="del">
-        <pc:chgData name="Sofia Negueruela Avellaneda" userId="1355ce59-2ee3-4584-b6f2-c7e4b99958aa" providerId="ADAL" clId="{75AA7C8B-0E1E-45F8-BB8D-1CDD06E81B9F}" dt="2026-04-17T16:30:06.464" v="2363" actId="47"/>
-        <pc:sldMkLst>
-          <pc:docMk/>
-          <pc:sldMk cId="3677430290" sldId="260"/>
-        </pc:sldMkLst>
-      </pc:sldChg>
-      <pc:sldChg chg="ord">
-        <pc:chgData name="Sofia Negueruela Avellaneda" userId="1355ce59-2ee3-4584-b6f2-c7e4b99958aa" providerId="ADAL" clId="{75AA7C8B-0E1E-45F8-BB8D-1CDD06E81B9F}" dt="2026-04-17T16:30:13.180" v="2367"/>
+      <pc:sldChg chg="mod ord modShow">
+        <pc:chgData name="Sofia Negueruela Avellaneda" userId="1355ce59-2ee3-4584-b6f2-c7e4b99958aa" providerId="ADAL" clId="{75AA7C8B-0E1E-45F8-BB8D-1CDD06E81B9F}" dt="2026-04-30T15:29:53.448" v="2591" actId="729"/>
         <pc:sldMkLst>
           <pc:docMk/>
           <pc:sldMk cId="2168037090" sldId="261"/>
         </pc:sldMkLst>
       </pc:sldChg>
-      <pc:sldChg chg="ord">
-        <pc:chgData name="Sofia Negueruela Avellaneda" userId="1355ce59-2ee3-4584-b6f2-c7e4b99958aa" providerId="ADAL" clId="{75AA7C8B-0E1E-45F8-BB8D-1CDD06E81B9F}" dt="2026-04-17T16:30:32.732" v="2373"/>
+      <pc:sldChg chg="mod ord modShow">
+        <pc:chgData name="Sofia Negueruela Avellaneda" userId="1355ce59-2ee3-4584-b6f2-c7e4b99958aa" providerId="ADAL" clId="{75AA7C8B-0E1E-45F8-BB8D-1CDD06E81B9F}" dt="2026-04-30T16:05:32.085" v="2653" actId="729"/>
         <pc:sldMkLst>
           <pc:docMk/>
           <pc:sldMk cId="2728812356" sldId="262"/>
-        </pc:sldMkLst>
-      </pc:sldChg>
-      <pc:sldChg chg="del">
-        <pc:chgData name="Sofia Negueruela Avellaneda" userId="1355ce59-2ee3-4584-b6f2-c7e4b99958aa" providerId="ADAL" clId="{75AA7C8B-0E1E-45F8-BB8D-1CDD06E81B9F}" dt="2026-04-17T16:30:58.922" v="2377" actId="47"/>
-        <pc:sldMkLst>
-          <pc:docMk/>
-          <pc:sldMk cId="1040330078" sldId="266"/>
         </pc:sldMkLst>
       </pc:sldChg>
       <pc:sldChg chg="modSp new mod">
@@ -341,14 +287,14 @@
           </ac:spMkLst>
         </pc:spChg>
       </pc:sldChg>
-      <pc:sldChg chg="modSp add mod">
-        <pc:chgData name="Sofia Negueruela Avellaneda" userId="1355ce59-2ee3-4584-b6f2-c7e4b99958aa" providerId="ADAL" clId="{75AA7C8B-0E1E-45F8-BB8D-1CDD06E81B9F}" dt="2026-04-17T16:32:34.309" v="2465" actId="20577"/>
+      <pc:sldChg chg="modSp add mod ord">
+        <pc:chgData name="Sofia Negueruela Avellaneda" userId="1355ce59-2ee3-4584-b6f2-c7e4b99958aa" providerId="ADAL" clId="{75AA7C8B-0E1E-45F8-BB8D-1CDD06E81B9F}" dt="2026-04-30T16:05:25.660" v="2652"/>
         <pc:sldMkLst>
           <pc:docMk/>
           <pc:sldMk cId="83607501" sldId="269"/>
         </pc:sldMkLst>
         <pc:spChg chg="mod">
-          <ac:chgData name="Sofia Negueruela Avellaneda" userId="1355ce59-2ee3-4584-b6f2-c7e4b99958aa" providerId="ADAL" clId="{75AA7C8B-0E1E-45F8-BB8D-1CDD06E81B9F}" dt="2026-04-17T16:31:09.761" v="2406" actId="20577"/>
+          <ac:chgData name="Sofia Negueruela Avellaneda" userId="1355ce59-2ee3-4584-b6f2-c7e4b99958aa" providerId="ADAL" clId="{75AA7C8B-0E1E-45F8-BB8D-1CDD06E81B9F}" dt="2026-04-30T16:05:22.104" v="2650" actId="20577"/>
           <ac:spMkLst>
             <pc:docMk/>
             <pc:sldMk cId="83607501" sldId="269"/>
@@ -365,17 +311,25 @@
         </pc:spChg>
       </pc:sldChg>
       <pc:sldChg chg="modSp add mod">
-        <pc:chgData name="Sofia Negueruela Avellaneda" userId="1355ce59-2ee3-4584-b6f2-c7e4b99958aa" providerId="ADAL" clId="{75AA7C8B-0E1E-45F8-BB8D-1CDD06E81B9F}" dt="2026-04-17T16:31:05.549" v="2396" actId="20577"/>
+        <pc:chgData name="Sofia Negueruela Avellaneda" userId="1355ce59-2ee3-4584-b6f2-c7e4b99958aa" providerId="ADAL" clId="{75AA7C8B-0E1E-45F8-BB8D-1CDD06E81B9F}" dt="2026-04-30T16:06:10.613" v="2749" actId="20577"/>
         <pc:sldMkLst>
           <pc:docMk/>
           <pc:sldMk cId="540189340" sldId="270"/>
         </pc:sldMkLst>
         <pc:spChg chg="mod">
-          <ac:chgData name="Sofia Negueruela Avellaneda" userId="1355ce59-2ee3-4584-b6f2-c7e4b99958aa" providerId="ADAL" clId="{75AA7C8B-0E1E-45F8-BB8D-1CDD06E81B9F}" dt="2026-04-17T16:31:05.549" v="2396" actId="20577"/>
+          <ac:chgData name="Sofia Negueruela Avellaneda" userId="1355ce59-2ee3-4584-b6f2-c7e4b99958aa" providerId="ADAL" clId="{75AA7C8B-0E1E-45F8-BB8D-1CDD06E81B9F}" dt="2026-04-30T16:05:48.664" v="2670" actId="20577"/>
           <ac:spMkLst>
             <pc:docMk/>
             <pc:sldMk cId="540189340" sldId="270"/>
             <ac:spMk id="2" creationId="{E98E98ED-E692-EEC6-40A0-9AD9A3FC76C0}"/>
+          </ac:spMkLst>
+        </pc:spChg>
+        <pc:spChg chg="mod">
+          <ac:chgData name="Sofia Negueruela Avellaneda" userId="1355ce59-2ee3-4584-b6f2-c7e4b99958aa" providerId="ADAL" clId="{75AA7C8B-0E1E-45F8-BB8D-1CDD06E81B9F}" dt="2026-04-30T16:06:10.613" v="2749" actId="20577"/>
+          <ac:spMkLst>
+            <pc:docMk/>
+            <pc:sldMk cId="540189340" sldId="270"/>
+            <ac:spMk id="3" creationId="{68B0B14C-B022-25C4-18CA-FDEDF12D37C6}"/>
           </ac:spMkLst>
         </pc:spChg>
       </pc:sldChg>
@@ -3310,13 +3264,13 @@
       <dgm:prSet presAssocID="{4352A6CA-5139-4EB1-B112-78D017F6D12E}" presName="iconRect" presStyleLbl="node1" presStyleIdx="0" presStyleCnt="3"/>
       <dgm:spPr>
         <a:blipFill>
-          <a:blip xmlns:r="http://schemas.openxmlformats.org/officeDocument/2006/relationships" r:embed="rId1">
+          <a:blip xmlns:r="http://schemas.openxmlformats.org/officeDocument/2006/relationships">
             <a:extLst>
               <a:ext uri="{28A0092B-C50C-407E-A947-70E740481C1C}">
                 <a14:useLocalDpi xmlns:a14="http://schemas.microsoft.com/office/drawing/2010/main" val="0"/>
               </a:ext>
               <a:ext uri="{96DAC541-7B7A-43D3-8B79-37D633B846F1}">
-                <asvg:svgBlip xmlns:asvg="http://schemas.microsoft.com/office/drawing/2016/SVG/main" r:embed="rId2"/>
+                <asvg:svgBlip xmlns:asvg="http://schemas.microsoft.com/office/drawing/2016/SVG/main" r:embed="rId1"/>
               </a:ext>
             </a:extLst>
           </a:blip>
@@ -3364,13 +3318,13 @@
       <dgm:prSet presAssocID="{38D9A974-7BA0-4DEF-9507-B2155A48B2E1}" presName="iconRect" presStyleLbl="node1" presStyleIdx="1" presStyleCnt="3"/>
       <dgm:spPr>
         <a:blipFill>
-          <a:blip xmlns:r="http://schemas.openxmlformats.org/officeDocument/2006/relationships" r:embed="rId3">
+          <a:blip xmlns:r="http://schemas.openxmlformats.org/officeDocument/2006/relationships">
             <a:extLst>
               <a:ext uri="{28A0092B-C50C-407E-A947-70E740481C1C}">
                 <a14:useLocalDpi xmlns:a14="http://schemas.microsoft.com/office/drawing/2010/main" val="0"/>
               </a:ext>
               <a:ext uri="{96DAC541-7B7A-43D3-8B79-37D633B846F1}">
-                <asvg:svgBlip xmlns:asvg="http://schemas.microsoft.com/office/drawing/2016/SVG/main" r:embed="rId4"/>
+                <asvg:svgBlip xmlns:asvg="http://schemas.microsoft.com/office/drawing/2016/SVG/main" r:embed="rId2"/>
               </a:ext>
             </a:extLst>
           </a:blip>
@@ -3418,13 +3372,13 @@
       <dgm:prSet presAssocID="{C2B509AA-4389-4F64-A5BE-26AC677292B9}" presName="iconRect" presStyleLbl="node1" presStyleIdx="2" presStyleCnt="3"/>
       <dgm:spPr>
         <a:blipFill>
-          <a:blip xmlns:r="http://schemas.openxmlformats.org/officeDocument/2006/relationships" r:embed="rId5">
+          <a:blip xmlns:r="http://schemas.openxmlformats.org/officeDocument/2006/relationships">
             <a:extLst>
               <a:ext uri="{28A0092B-C50C-407E-A947-70E740481C1C}">
                 <a14:useLocalDpi xmlns:a14="http://schemas.microsoft.com/office/drawing/2010/main" val="0"/>
               </a:ext>
               <a:ext uri="{96DAC541-7B7A-43D3-8B79-37D633B846F1}">
-                <asvg:svgBlip xmlns:asvg="http://schemas.microsoft.com/office/drawing/2016/SVG/main" r:embed="rId6"/>
+                <asvg:svgBlip xmlns:asvg="http://schemas.microsoft.com/office/drawing/2016/SVG/main" r:embed="rId3"/>
               </a:ext>
             </a:extLst>
           </a:blip>
@@ -3657,13 +3611,13 @@
       <dgm:prSet presAssocID="{2FEA03CC-5337-4D9A-83B7-D6AFB414A8CA}" presName="iconRect" presStyleLbl="node1" presStyleIdx="0" presStyleCnt="3"/>
       <dgm:spPr>
         <a:blipFill>
-          <a:blip xmlns:r="http://schemas.openxmlformats.org/officeDocument/2006/relationships" r:embed="rId1">
+          <a:blip xmlns:r="http://schemas.openxmlformats.org/officeDocument/2006/relationships">
             <a:extLst>
               <a:ext uri="{28A0092B-C50C-407E-A947-70E740481C1C}">
                 <a14:useLocalDpi xmlns:a14="http://schemas.microsoft.com/office/drawing/2010/main" val="0"/>
               </a:ext>
               <a:ext uri="{96DAC541-7B7A-43D3-8B79-37D633B846F1}">
-                <asvg:svgBlip xmlns:asvg="http://schemas.microsoft.com/office/drawing/2016/SVG/main" r:embed="rId2"/>
+                <asvg:svgBlip xmlns:asvg="http://schemas.microsoft.com/office/drawing/2016/SVG/main" r:embed="rId1"/>
               </a:ext>
             </a:extLst>
           </a:blip>
@@ -3711,13 +3665,13 @@
       <dgm:prSet presAssocID="{CC000874-6FD5-4D52-AFA7-D28320D8B787}" presName="iconRect" presStyleLbl="node1" presStyleIdx="1" presStyleCnt="3"/>
       <dgm:spPr>
         <a:blipFill>
-          <a:blip xmlns:r="http://schemas.openxmlformats.org/officeDocument/2006/relationships" r:embed="rId3">
+          <a:blip xmlns:r="http://schemas.openxmlformats.org/officeDocument/2006/relationships">
             <a:extLst>
               <a:ext uri="{28A0092B-C50C-407E-A947-70E740481C1C}">
                 <a14:useLocalDpi xmlns:a14="http://schemas.microsoft.com/office/drawing/2010/main" val="0"/>
               </a:ext>
               <a:ext uri="{96DAC541-7B7A-43D3-8B79-37D633B846F1}">
-                <asvg:svgBlip xmlns:asvg="http://schemas.microsoft.com/office/drawing/2016/SVG/main" r:embed="rId4"/>
+                <asvg:svgBlip xmlns:asvg="http://schemas.microsoft.com/office/drawing/2016/SVG/main" r:embed="rId2"/>
               </a:ext>
             </a:extLst>
           </a:blip>
@@ -3765,13 +3719,13 @@
       <dgm:prSet presAssocID="{9A01159B-6942-48E5-AEC6-7CD42C931007}" presName="iconRect" presStyleLbl="node1" presStyleIdx="2" presStyleCnt="3"/>
       <dgm:spPr>
         <a:blipFill>
-          <a:blip xmlns:r="http://schemas.openxmlformats.org/officeDocument/2006/relationships" r:embed="rId5">
+          <a:blip xmlns:r="http://schemas.openxmlformats.org/officeDocument/2006/relationships">
             <a:extLst>
               <a:ext uri="{28A0092B-C50C-407E-A947-70E740481C1C}">
                 <a14:useLocalDpi xmlns:a14="http://schemas.microsoft.com/office/drawing/2010/main" val="0"/>
               </a:ext>
               <a:ext uri="{96DAC541-7B7A-43D3-8B79-37D633B846F1}">
-                <asvg:svgBlip xmlns:asvg="http://schemas.microsoft.com/office/drawing/2016/SVG/main" r:embed="rId6"/>
+                <asvg:svgBlip xmlns:asvg="http://schemas.microsoft.com/office/drawing/2016/SVG/main" r:embed="rId3"/>
               </a:ext>
             </a:extLst>
           </a:blip>
@@ -4630,13 +4584,13 @@
           <a:avLst/>
         </a:prstGeom>
         <a:blipFill>
-          <a:blip xmlns:r="http://schemas.openxmlformats.org/officeDocument/2006/relationships" r:embed="rId1">
+          <a:blip xmlns:r="http://schemas.openxmlformats.org/officeDocument/2006/relationships">
             <a:extLst>
               <a:ext uri="{28A0092B-C50C-407E-A947-70E740481C1C}">
                 <a14:useLocalDpi xmlns:a14="http://schemas.microsoft.com/office/drawing/2010/main" val="0"/>
               </a:ext>
               <a:ext uri="{96DAC541-7B7A-43D3-8B79-37D633B846F1}">
-                <asvg:svgBlip xmlns:asvg="http://schemas.microsoft.com/office/drawing/2016/SVG/main" r:embed="rId2"/>
+                <asvg:svgBlip xmlns:asvg="http://schemas.microsoft.com/office/drawing/2016/SVG/main" r:embed="rId1"/>
               </a:ext>
             </a:extLst>
           </a:blip>
@@ -4783,13 +4737,13 @@
           <a:avLst/>
         </a:prstGeom>
         <a:blipFill>
-          <a:blip xmlns:r="http://schemas.openxmlformats.org/officeDocument/2006/relationships" r:embed="rId3">
+          <a:blip xmlns:r="http://schemas.openxmlformats.org/officeDocument/2006/relationships">
             <a:extLst>
               <a:ext uri="{28A0092B-C50C-407E-A947-70E740481C1C}">
                 <a14:useLocalDpi xmlns:a14="http://schemas.microsoft.com/office/drawing/2010/main" val="0"/>
               </a:ext>
               <a:ext uri="{96DAC541-7B7A-43D3-8B79-37D633B846F1}">
-                <asvg:svgBlip xmlns:asvg="http://schemas.microsoft.com/office/drawing/2016/SVG/main" r:embed="rId4"/>
+                <asvg:svgBlip xmlns:asvg="http://schemas.microsoft.com/office/drawing/2016/SVG/main" r:embed="rId2"/>
               </a:ext>
             </a:extLst>
           </a:blip>
@@ -4936,13 +4890,13 @@
           <a:avLst/>
         </a:prstGeom>
         <a:blipFill>
-          <a:blip xmlns:r="http://schemas.openxmlformats.org/officeDocument/2006/relationships" r:embed="rId5">
+          <a:blip xmlns:r="http://schemas.openxmlformats.org/officeDocument/2006/relationships">
             <a:extLst>
               <a:ext uri="{28A0092B-C50C-407E-A947-70E740481C1C}">
                 <a14:useLocalDpi xmlns:a14="http://schemas.microsoft.com/office/drawing/2010/main" val="0"/>
               </a:ext>
               <a:ext uri="{96DAC541-7B7A-43D3-8B79-37D633B846F1}">
-                <asvg:svgBlip xmlns:asvg="http://schemas.microsoft.com/office/drawing/2016/SVG/main" r:embed="rId6"/>
+                <asvg:svgBlip xmlns:asvg="http://schemas.microsoft.com/office/drawing/2016/SVG/main" r:embed="rId3"/>
               </a:ext>
             </a:extLst>
           </a:blip>
@@ -5101,13 +5055,13 @@
           <a:avLst/>
         </a:prstGeom>
         <a:blipFill>
-          <a:blip xmlns:r="http://schemas.openxmlformats.org/officeDocument/2006/relationships" r:embed="rId1">
+          <a:blip xmlns:r="http://schemas.openxmlformats.org/officeDocument/2006/relationships">
             <a:extLst>
               <a:ext uri="{28A0092B-C50C-407E-A947-70E740481C1C}">
                 <a14:useLocalDpi xmlns:a14="http://schemas.microsoft.com/office/drawing/2010/main" val="0"/>
               </a:ext>
               <a:ext uri="{96DAC541-7B7A-43D3-8B79-37D633B846F1}">
-                <asvg:svgBlip xmlns:asvg="http://schemas.microsoft.com/office/drawing/2016/SVG/main" r:embed="rId2"/>
+                <asvg:svgBlip xmlns:asvg="http://schemas.microsoft.com/office/drawing/2016/SVG/main" r:embed="rId1"/>
               </a:ext>
             </a:extLst>
           </a:blip>
@@ -5254,13 +5208,13 @@
           <a:avLst/>
         </a:prstGeom>
         <a:blipFill>
-          <a:blip xmlns:r="http://schemas.openxmlformats.org/officeDocument/2006/relationships" r:embed="rId3">
+          <a:blip xmlns:r="http://schemas.openxmlformats.org/officeDocument/2006/relationships">
             <a:extLst>
               <a:ext uri="{28A0092B-C50C-407E-A947-70E740481C1C}">
                 <a14:useLocalDpi xmlns:a14="http://schemas.microsoft.com/office/drawing/2010/main" val="0"/>
               </a:ext>
               <a:ext uri="{96DAC541-7B7A-43D3-8B79-37D633B846F1}">
-                <asvg:svgBlip xmlns:asvg="http://schemas.microsoft.com/office/drawing/2016/SVG/main" r:embed="rId4"/>
+                <asvg:svgBlip xmlns:asvg="http://schemas.microsoft.com/office/drawing/2016/SVG/main" r:embed="rId2"/>
               </a:ext>
             </a:extLst>
           </a:blip>
@@ -5407,13 +5361,13 @@
           <a:avLst/>
         </a:prstGeom>
         <a:blipFill>
-          <a:blip xmlns:r="http://schemas.openxmlformats.org/officeDocument/2006/relationships" r:embed="rId5">
+          <a:blip xmlns:r="http://schemas.openxmlformats.org/officeDocument/2006/relationships">
             <a:extLst>
               <a:ext uri="{28A0092B-C50C-407E-A947-70E740481C1C}">
                 <a14:useLocalDpi xmlns:a14="http://schemas.microsoft.com/office/drawing/2010/main" val="0"/>
               </a:ext>
               <a:ext uri="{96DAC541-7B7A-43D3-8B79-37D633B846F1}">
-                <asvg:svgBlip xmlns:asvg="http://schemas.microsoft.com/office/drawing/2016/SVG/main" r:embed="rId6"/>
+                <asvg:svgBlip xmlns:asvg="http://schemas.microsoft.com/office/drawing/2016/SVG/main" r:embed="rId3"/>
               </a:ext>
             </a:extLst>
           </a:blip>
@@ -10356,7 +10310,7 @@
           <a:p>
             <a:fld id="{11DDA3B7-DF4B-4512-9353-21E7A8669511}" type="datetimeFigureOut">
               <a:rPr lang="es-ES" smtClean="0"/>
-              <a:t>17/04/2026</a:t>
+              <a:t>30/04/2026</a:t>
             </a:fld>
             <a:endParaRPr lang="es-ES"/>
           </a:p>
@@ -11394,7 +11348,7 @@
           <a:p>
             <a:fld id="{FA838AF1-FF45-4AF1-AEA9-0AA3EBC94766}" type="datetimeFigureOut">
               <a:rPr lang="es-ES" smtClean="0"/>
-              <a:t>17/04/2026</a:t>
+              <a:t>30/04/2026</a:t>
             </a:fld>
             <a:endParaRPr lang="es-ES"/>
           </a:p>
@@ -11592,7 +11546,7 @@
           <a:p>
             <a:fld id="{FA838AF1-FF45-4AF1-AEA9-0AA3EBC94766}" type="datetimeFigureOut">
               <a:rPr lang="es-ES" smtClean="0"/>
-              <a:t>17/04/2026</a:t>
+              <a:t>30/04/2026</a:t>
             </a:fld>
             <a:endParaRPr lang="es-ES"/>
           </a:p>
@@ -11800,7 +11754,7 @@
           <a:p>
             <a:fld id="{FA838AF1-FF45-4AF1-AEA9-0AA3EBC94766}" type="datetimeFigureOut">
               <a:rPr lang="es-ES" smtClean="0"/>
-              <a:t>17/04/2026</a:t>
+              <a:t>30/04/2026</a:t>
             </a:fld>
             <a:endParaRPr lang="es-ES"/>
           </a:p>
@@ -11998,7 +11952,7 @@
           <a:p>
             <a:fld id="{FA838AF1-FF45-4AF1-AEA9-0AA3EBC94766}" type="datetimeFigureOut">
               <a:rPr lang="es-ES" smtClean="0"/>
-              <a:t>17/04/2026</a:t>
+              <a:t>30/04/2026</a:t>
             </a:fld>
             <a:endParaRPr lang="es-ES"/>
           </a:p>
@@ -12273,7 +12227,7 @@
           <a:p>
             <a:fld id="{FA838AF1-FF45-4AF1-AEA9-0AA3EBC94766}" type="datetimeFigureOut">
               <a:rPr lang="es-ES" smtClean="0"/>
-              <a:t>17/04/2026</a:t>
+              <a:t>30/04/2026</a:t>
             </a:fld>
             <a:endParaRPr lang="es-ES"/>
           </a:p>
@@ -12538,7 +12492,7 @@
           <a:p>
             <a:fld id="{FA838AF1-FF45-4AF1-AEA9-0AA3EBC94766}" type="datetimeFigureOut">
               <a:rPr lang="es-ES" smtClean="0"/>
-              <a:t>17/04/2026</a:t>
+              <a:t>30/04/2026</a:t>
             </a:fld>
             <a:endParaRPr lang="es-ES"/>
           </a:p>
@@ -12950,7 +12904,7 @@
           <a:p>
             <a:fld id="{FA838AF1-FF45-4AF1-AEA9-0AA3EBC94766}" type="datetimeFigureOut">
               <a:rPr lang="es-ES" smtClean="0"/>
-              <a:t>17/04/2026</a:t>
+              <a:t>30/04/2026</a:t>
             </a:fld>
             <a:endParaRPr lang="es-ES"/>
           </a:p>
@@ -13091,7 +13045,7 @@
           <a:p>
             <a:fld id="{FA838AF1-FF45-4AF1-AEA9-0AA3EBC94766}" type="datetimeFigureOut">
               <a:rPr lang="es-ES" smtClean="0"/>
-              <a:t>17/04/2026</a:t>
+              <a:t>30/04/2026</a:t>
             </a:fld>
             <a:endParaRPr lang="es-ES"/>
           </a:p>
@@ -13204,7 +13158,7 @@
           <a:p>
             <a:fld id="{FA838AF1-FF45-4AF1-AEA9-0AA3EBC94766}" type="datetimeFigureOut">
               <a:rPr lang="es-ES" smtClean="0"/>
-              <a:t>17/04/2026</a:t>
+              <a:t>30/04/2026</a:t>
             </a:fld>
             <a:endParaRPr lang="es-ES"/>
           </a:p>
@@ -13515,7 +13469,7 @@
           <a:p>
             <a:fld id="{FA838AF1-FF45-4AF1-AEA9-0AA3EBC94766}" type="datetimeFigureOut">
               <a:rPr lang="es-ES" smtClean="0"/>
-              <a:t>17/04/2026</a:t>
+              <a:t>30/04/2026</a:t>
             </a:fld>
             <a:endParaRPr lang="es-ES"/>
           </a:p>
@@ -13803,7 +13757,7 @@
           <a:p>
             <a:fld id="{FA838AF1-FF45-4AF1-AEA9-0AA3EBC94766}" type="datetimeFigureOut">
               <a:rPr lang="es-ES" smtClean="0"/>
-              <a:t>17/04/2026</a:t>
+              <a:t>30/04/2026</a:t>
             </a:fld>
             <a:endParaRPr lang="es-ES"/>
           </a:p>
@@ -14044,7 +13998,7 @@
           <a:p>
             <a:fld id="{FA838AF1-FF45-4AF1-AEA9-0AA3EBC94766}" type="datetimeFigureOut">
               <a:rPr lang="es-ES" smtClean="0"/>
-              <a:t>17/04/2026</a:t>
+              <a:t>30/04/2026</a:t>
             </a:fld>
             <a:endParaRPr lang="es-ES"/>
           </a:p>
@@ -15428,7 +15382,7 @@
           <a:p>
             <a:r>
               <a:rPr lang="es-ES" dirty="0"/>
-              <a:t>Estado actual</a:t>
+              <a:t>Resultados (estado actual)</a:t>
             </a:r>
           </a:p>
         </p:txBody>
@@ -15454,7 +15408,27 @@
           <a:bodyPr/>
           <a:lstStyle/>
           <a:p>
-            <a:endParaRPr lang="es-ES"/>
+            <a:r>
+              <a:rPr lang="es-ES" dirty="0" err="1"/>
+              <a:t>Check</a:t>
+            </a:r>
+            <a:r>
+              <a:rPr lang="es-ES" dirty="0"/>
+              <a:t> </a:t>
+            </a:r>
+            <a:r>
+              <a:rPr lang="es-ES" dirty="0" err="1"/>
+              <a:t>list</a:t>
+            </a:r>
+            <a:r>
+              <a:rPr lang="es-ES" dirty="0"/>
+              <a:t> de los objetivos (diapo inicial) y breve resumen de lo que he hecho, lo que falta y cómo va </a:t>
+            </a:r>
+            <a:r>
+              <a:rPr lang="es-ES"/>
+              <a:t>el proyecto</a:t>
+            </a:r>
+            <a:endParaRPr lang="es-ES" dirty="0"/>
           </a:p>
         </p:txBody>
       </p:sp>
@@ -15472,7 +15446,7 @@
 </file>
 
 <file path=ppt/slides/slide2.xml><?xml version="1.0" encoding="utf-8"?>
-<p:sld xmlns:a="http://schemas.openxmlformats.org/drawingml/2006/main" xmlns:r="http://schemas.openxmlformats.org/officeDocument/2006/relationships" xmlns:p="http://schemas.openxmlformats.org/presentationml/2006/main">
+<p:sld xmlns:a="http://schemas.openxmlformats.org/drawingml/2006/main" xmlns:r="http://schemas.openxmlformats.org/officeDocument/2006/relationships" xmlns:p="http://schemas.openxmlformats.org/presentationml/2006/main" show="0">
   <p:cSld>
     <p:bg>
       <p:bgPr>
@@ -17243,7 +17217,7 @@
 </file>
 
 <file path=ppt/slides/slide8.xml><?xml version="1.0" encoding="utf-8"?>
-<p:sld xmlns:a="http://schemas.openxmlformats.org/drawingml/2006/main" xmlns:r="http://schemas.openxmlformats.org/officeDocument/2006/relationships" xmlns:p="http://schemas.openxmlformats.org/presentationml/2006/main">
+<p:sld xmlns:a="http://schemas.openxmlformats.org/drawingml/2006/main" xmlns:r="http://schemas.openxmlformats.org/officeDocument/2006/relationships" xmlns:p="http://schemas.openxmlformats.org/presentationml/2006/main" show="0">
   <p:cSld>
     <p:bg>
       <p:bgPr>
@@ -17697,9 +17671,10 @@
           <a:lstStyle/>
           <a:p>
             <a:r>
-              <a:rPr lang="es-ES" dirty="0"/>
-              <a:t>Resultados</a:t>
+              <a:rPr lang="es-ES" dirty="0" err="1"/>
+              <a:t>Testing</a:t>
             </a:r>
+            <a:endParaRPr lang="es-ES" dirty="0"/>
           </a:p>
         </p:txBody>
       </p:sp>
